--- a/instructor/l10/l10-pad.pptx
+++ b/instructor/l10/l10-pad.pptx
@@ -8,17 +8,16 @@
     <p:sldId id="271" r:id="rId2"/>
     <p:sldId id="283" r:id="rId3"/>
     <p:sldId id="273" r:id="rId4"/>
-    <p:sldId id="266" r:id="rId5"/>
-    <p:sldId id="276" r:id="rId6"/>
-    <p:sldId id="275" r:id="rId7"/>
-    <p:sldId id="277" r:id="rId8"/>
-    <p:sldId id="286" r:id="rId9"/>
-    <p:sldId id="284" r:id="rId10"/>
-    <p:sldId id="287" r:id="rId11"/>
-    <p:sldId id="285" r:id="rId12"/>
-    <p:sldId id="280" r:id="rId13"/>
-    <p:sldId id="281" r:id="rId14"/>
-    <p:sldId id="282" r:id="rId15"/>
+    <p:sldId id="276" r:id="rId5"/>
+    <p:sldId id="275" r:id="rId6"/>
+    <p:sldId id="277" r:id="rId7"/>
+    <p:sldId id="286" r:id="rId8"/>
+    <p:sldId id="284" r:id="rId9"/>
+    <p:sldId id="287" r:id="rId10"/>
+    <p:sldId id="285" r:id="rId11"/>
+    <p:sldId id="280" r:id="rId12"/>
+    <p:sldId id="281" r:id="rId13"/>
+    <p:sldId id="282" r:id="rId14"/>
   </p:sldIdLst>
   <p:sldSz cx="12192000" cy="6858000"/>
   <p:notesSz cx="6858000" cy="9144000"/>
@@ -272,7 +271,7 @@
           <a:p>
             <a:fld id="{0A6490CE-BE8E-7E4B-9B67-11CEB3AEEF49}" type="datetimeFigureOut">
               <a:rPr lang="en-US" smtClean="0"/>
-              <a:t>10/9/24</a:t>
+              <a:t>10/14/26</a:t>
             </a:fld>
             <a:endParaRPr lang="en-US"/>
           </a:p>
@@ -470,7 +469,7 @@
           <a:p>
             <a:fld id="{0A6490CE-BE8E-7E4B-9B67-11CEB3AEEF49}" type="datetimeFigureOut">
               <a:rPr lang="en-US" smtClean="0"/>
-              <a:t>10/9/24</a:t>
+              <a:t>10/14/26</a:t>
             </a:fld>
             <a:endParaRPr lang="en-US"/>
           </a:p>
@@ -678,7 +677,7 @@
           <a:p>
             <a:fld id="{0A6490CE-BE8E-7E4B-9B67-11CEB3AEEF49}" type="datetimeFigureOut">
               <a:rPr lang="en-US" smtClean="0"/>
-              <a:t>10/9/24</a:t>
+              <a:t>10/14/26</a:t>
             </a:fld>
             <a:endParaRPr lang="en-US"/>
           </a:p>
@@ -876,7 +875,7 @@
           <a:p>
             <a:fld id="{0A6490CE-BE8E-7E4B-9B67-11CEB3AEEF49}" type="datetimeFigureOut">
               <a:rPr lang="en-US" smtClean="0"/>
-              <a:t>10/9/24</a:t>
+              <a:t>10/14/26</a:t>
             </a:fld>
             <a:endParaRPr lang="en-US"/>
           </a:p>
@@ -1151,7 +1150,7 @@
           <a:p>
             <a:fld id="{0A6490CE-BE8E-7E4B-9B67-11CEB3AEEF49}" type="datetimeFigureOut">
               <a:rPr lang="en-US" smtClean="0"/>
-              <a:t>10/9/24</a:t>
+              <a:t>10/14/26</a:t>
             </a:fld>
             <a:endParaRPr lang="en-US"/>
           </a:p>
@@ -1416,7 +1415,7 @@
           <a:p>
             <a:fld id="{0A6490CE-BE8E-7E4B-9B67-11CEB3AEEF49}" type="datetimeFigureOut">
               <a:rPr lang="en-US" smtClean="0"/>
-              <a:t>10/9/24</a:t>
+              <a:t>10/14/26</a:t>
             </a:fld>
             <a:endParaRPr lang="en-US"/>
           </a:p>
@@ -1828,7 +1827,7 @@
           <a:p>
             <a:fld id="{0A6490CE-BE8E-7E4B-9B67-11CEB3AEEF49}" type="datetimeFigureOut">
               <a:rPr lang="en-US" smtClean="0"/>
-              <a:t>10/9/24</a:t>
+              <a:t>10/14/26</a:t>
             </a:fld>
             <a:endParaRPr lang="en-US"/>
           </a:p>
@@ -1969,7 +1968,7 @@
           <a:p>
             <a:fld id="{0A6490CE-BE8E-7E4B-9B67-11CEB3AEEF49}" type="datetimeFigureOut">
               <a:rPr lang="en-US" smtClean="0"/>
-              <a:t>10/9/24</a:t>
+              <a:t>10/14/26</a:t>
             </a:fld>
             <a:endParaRPr lang="en-US"/>
           </a:p>
@@ -2082,7 +2081,7 @@
           <a:p>
             <a:fld id="{0A6490CE-BE8E-7E4B-9B67-11CEB3AEEF49}" type="datetimeFigureOut">
               <a:rPr lang="en-US" smtClean="0"/>
-              <a:t>10/9/24</a:t>
+              <a:t>10/14/26</a:t>
             </a:fld>
             <a:endParaRPr lang="en-US"/>
           </a:p>
@@ -2393,7 +2392,7 @@
           <a:p>
             <a:fld id="{0A6490CE-BE8E-7E4B-9B67-11CEB3AEEF49}" type="datetimeFigureOut">
               <a:rPr lang="en-US" smtClean="0"/>
-              <a:t>10/9/24</a:t>
+              <a:t>10/14/26</a:t>
             </a:fld>
             <a:endParaRPr lang="en-US"/>
           </a:p>
@@ -2681,7 +2680,7 @@
           <a:p>
             <a:fld id="{0A6490CE-BE8E-7E4B-9B67-11CEB3AEEF49}" type="datetimeFigureOut">
               <a:rPr lang="en-US" smtClean="0"/>
-              <a:t>10/9/24</a:t>
+              <a:t>10/14/26</a:t>
             </a:fld>
             <a:endParaRPr lang="en-US"/>
           </a:p>
@@ -2922,7 +2921,7 @@
           <a:p>
             <a:fld id="{0A6490CE-BE8E-7E4B-9B67-11CEB3AEEF49}" type="datetimeFigureOut">
               <a:rPr lang="en-US" smtClean="0"/>
-              <a:t>10/9/24</a:t>
+              <a:t>10/14/26</a:t>
             </a:fld>
             <a:endParaRPr lang="en-US"/>
           </a:p>
@@ -3503,13 +3502,7 @@
   <p:cSld>
     <p:spTree>
       <p:nvGrpSpPr>
-        <p:cNvPr id="1" name="">
-          <a:extLst>
-            <a:ext uri="{FF2B5EF4-FFF2-40B4-BE49-F238E27FC236}">
-              <a16:creationId xmlns:a16="http://schemas.microsoft.com/office/drawing/2014/main" id="{F59F5A11-6E09-7F49-A451-07F028756835}"/>
-            </a:ext>
-          </a:extLst>
-        </p:cNvPr>
+        <p:cNvPr id="1" name=""/>
         <p:cNvGrpSpPr/>
         <p:nvPr/>
       </p:nvGrpSpPr>
@@ -3523,10 +3516,10 @@
       </p:grpSpPr>
       <p:pic>
         <p:nvPicPr>
-          <p:cNvPr id="3" name="Picture 2">
-            <a:extLst>
-              <a:ext uri="{FF2B5EF4-FFF2-40B4-BE49-F238E27FC236}">
-                <a16:creationId xmlns:a16="http://schemas.microsoft.com/office/drawing/2014/main" id="{967DEAE7-351A-F52E-F5C3-E6D2130F87F3}"/>
+          <p:cNvPr id="2" name="Picture 1">
+            <a:extLst>
+              <a:ext uri="{FF2B5EF4-FFF2-40B4-BE49-F238E27FC236}">
+                <a16:creationId xmlns:a16="http://schemas.microsoft.com/office/drawing/2014/main" id="{01355307-B39A-0C53-80E2-136F412AF4FB}"/>
               </a:ext>
             </a:extLst>
           </p:cNvPr>
@@ -3543,8 +3536,8 @@
         </p:blipFill>
         <p:spPr>
           <a:xfrm>
-            <a:off x="2293554" y="1305766"/>
-            <a:ext cx="7604891" cy="4246468"/>
+            <a:off x="1376423" y="579043"/>
+            <a:ext cx="7772400" cy="4871942"/>
           </a:xfrm>
           <a:prstGeom prst="rect">
             <a:avLst/>
@@ -3553,10 +3546,10 @@
       </p:pic>
       <p:sp>
         <p:nvSpPr>
-          <p:cNvPr id="2" name="TextBox 1">
-            <a:extLst>
-              <a:ext uri="{FF2B5EF4-FFF2-40B4-BE49-F238E27FC236}">
-                <a16:creationId xmlns:a16="http://schemas.microsoft.com/office/drawing/2014/main" id="{C9376985-80F8-D111-72DA-ABE901F2C50F}"/>
+          <p:cNvPr id="3" name="TextBox 2">
+            <a:extLst>
+              <a:ext uri="{FF2B5EF4-FFF2-40B4-BE49-F238E27FC236}">
+                <a16:creationId xmlns:a16="http://schemas.microsoft.com/office/drawing/2014/main" id="{A8B20AC4-A791-BEDB-3FE1-152D5F72FB62}"/>
               </a:ext>
             </a:extLst>
           </p:cNvPr>
@@ -3565,8 +3558,8 @@
         </p:nvSpPr>
         <p:spPr>
           <a:xfrm>
-            <a:off x="273269" y="746234"/>
-            <a:ext cx="4635062" cy="830997"/>
+            <a:off x="8516303" y="2020604"/>
+            <a:ext cx="1678329" cy="369332"/>
           </a:xfrm>
           <a:prstGeom prst="rect">
             <a:avLst/>
@@ -3580,1134 +3573,248 @@
           <a:lstStyle/>
           <a:p>
             <a:r>
-              <a:rPr lang="en-US" sz="2400" dirty="0">
-                <a:solidFill>
-                  <a:srgbClr val="FF0000"/>
-                </a:solidFill>
-              </a:rPr>
-              <a:t>L1, L2, I4 etc. are the</a:t>
-            </a:r>
-          </a:p>
-          <a:p>
-            <a:r>
-              <a:rPr lang="en-US" sz="2400" dirty="0">
-                <a:solidFill>
-                  <a:srgbClr val="FF0000"/>
-                </a:solidFill>
-              </a:rPr>
-              <a:t>NAMES OF THE CONSTANTS</a:t>
+              <a:rPr lang="en-US" u="sng" dirty="0"/>
+              <a:t>result</a:t>
+            </a:r>
+            <a:r>
+              <a:rPr lang="en-US" dirty="0"/>
+              <a:t> will be?</a:t>
             </a:r>
           </a:p>
         </p:txBody>
       </p:sp>
-      <p:grpSp>
-        <p:nvGrpSpPr>
-          <p:cNvPr id="6" name="Group 5">
-            <a:extLst>
-              <a:ext uri="{FF2B5EF4-FFF2-40B4-BE49-F238E27FC236}">
-                <a16:creationId xmlns:a16="http://schemas.microsoft.com/office/drawing/2014/main" id="{FE49CCC1-BE38-00B8-9976-0E4DEFF6E4B2}"/>
-              </a:ext>
-            </a:extLst>
-          </p:cNvPr>
-          <p:cNvGrpSpPr/>
+      <p:sp>
+        <p:nvSpPr>
+          <p:cNvPr id="4" name="TextBox 3">
+            <a:extLst>
+              <a:ext uri="{FF2B5EF4-FFF2-40B4-BE49-F238E27FC236}">
+                <a16:creationId xmlns:a16="http://schemas.microsoft.com/office/drawing/2014/main" id="{D825AC10-AAD5-FF12-8354-7683F93E751F}"/>
+              </a:ext>
+            </a:extLst>
+          </p:cNvPr>
+          <p:cNvSpPr txBox="1"/>
           <p:nvPr/>
-        </p:nvGrpSpPr>
-        <p:grpSpPr>
+        </p:nvSpPr>
+        <p:spPr>
           <a:xfrm>
-            <a:off x="2590800" y="4712262"/>
-            <a:ext cx="642280" cy="646331"/>
-            <a:chOff x="1008994" y="3272345"/>
-            <a:chExt cx="642280" cy="646331"/>
-          </a:xfrm>
-        </p:grpSpPr>
-        <p:sp>
-          <p:nvSpPr>
-            <p:cNvPr id="5" name="Rectangle 4">
-              <a:extLst>
-                <a:ext uri="{FF2B5EF4-FFF2-40B4-BE49-F238E27FC236}">
-                  <a16:creationId xmlns:a16="http://schemas.microsoft.com/office/drawing/2014/main" id="{70DE40B5-AD30-7327-31AB-5AEC12F7978A}"/>
-                </a:ext>
-              </a:extLst>
-            </p:cNvPr>
-            <p:cNvSpPr/>
-            <p:nvPr/>
-          </p:nvSpPr>
-          <p:spPr>
-            <a:xfrm>
-              <a:off x="1031164" y="3385303"/>
-              <a:ext cx="620110" cy="420413"/>
-            </a:xfrm>
-            <a:prstGeom prst="rect">
-              <a:avLst/>
-            </a:prstGeom>
-            <a:solidFill>
-              <a:schemeClr val="bg1"/>
-            </a:solidFill>
-            <a:ln>
-              <a:solidFill>
-                <a:schemeClr val="bg1"/>
-              </a:solidFill>
-            </a:ln>
-          </p:spPr>
-          <p:style>
-            <a:lnRef idx="2">
-              <a:schemeClr val="accent1">
-                <a:shade val="15000"/>
-              </a:schemeClr>
-            </a:lnRef>
-            <a:fillRef idx="1">
-              <a:schemeClr val="accent1"/>
-            </a:fillRef>
-            <a:effectRef idx="0">
-              <a:schemeClr val="accent1"/>
-            </a:effectRef>
-            <a:fontRef idx="minor">
-              <a:schemeClr val="lt1"/>
-            </a:fontRef>
-          </p:style>
-          <p:txBody>
-            <a:bodyPr rtlCol="0" anchor="ctr"/>
-            <a:lstStyle/>
-            <a:p>
-              <a:pPr algn="ctr"/>
-              <a:endParaRPr lang="en-US"/>
-            </a:p>
-          </p:txBody>
-        </p:sp>
-        <p:sp>
-          <p:nvSpPr>
-            <p:cNvPr id="4" name="TextBox 3">
-              <a:extLst>
-                <a:ext uri="{FF2B5EF4-FFF2-40B4-BE49-F238E27FC236}">
-                  <a16:creationId xmlns:a16="http://schemas.microsoft.com/office/drawing/2014/main" id="{A75A88C7-E6D7-6CB3-8AAE-54057D3903BB}"/>
-                </a:ext>
-              </a:extLst>
-            </p:cNvPr>
-            <p:cNvSpPr txBox="1"/>
-            <p:nvPr/>
-          </p:nvSpPr>
-          <p:spPr>
-            <a:xfrm>
-              <a:off x="1008994" y="3272345"/>
-              <a:ext cx="620110" cy="646331"/>
-            </a:xfrm>
-            <a:prstGeom prst="rect">
-              <a:avLst/>
-            </a:prstGeom>
-            <a:noFill/>
-          </p:spPr>
-          <p:txBody>
-            <a:bodyPr wrap="square" rtlCol="0">
-              <a:spAutoFit/>
-            </a:bodyPr>
-            <a:lstStyle/>
-            <a:p>
-              <a:r>
-                <a:rPr lang="en-US" sz="3600" dirty="0"/>
-                <a:t>L1</a:t>
-              </a:r>
-            </a:p>
-          </p:txBody>
-        </p:sp>
-      </p:grpSp>
-      <p:grpSp>
-        <p:nvGrpSpPr>
-          <p:cNvPr id="7" name="Group 6">
-            <a:extLst>
-              <a:ext uri="{FF2B5EF4-FFF2-40B4-BE49-F238E27FC236}">
-                <a16:creationId xmlns:a16="http://schemas.microsoft.com/office/drawing/2014/main" id="{7EC5A60A-BD1F-9499-BC90-4AF172FA5511}"/>
-              </a:ext>
-            </a:extLst>
-          </p:cNvPr>
-          <p:cNvGrpSpPr/>
+            <a:off x="8516303" y="4026267"/>
+            <a:ext cx="1678329" cy="369332"/>
+          </a:xfrm>
+          <a:prstGeom prst="rect">
+            <a:avLst/>
+          </a:prstGeom>
+          <a:noFill/>
+        </p:spPr>
+        <p:txBody>
+          <a:bodyPr wrap="square" rtlCol="0">
+            <a:spAutoFit/>
+          </a:bodyPr>
+          <a:lstStyle/>
+          <a:p>
+            <a:r>
+              <a:rPr lang="en-US" u="sng" dirty="0"/>
+              <a:t>result</a:t>
+            </a:r>
+            <a:r>
+              <a:rPr lang="en-US" dirty="0"/>
+              <a:t> will be?</a:t>
+            </a:r>
+          </a:p>
+        </p:txBody>
+      </p:sp>
+      <p:sp>
+        <p:nvSpPr>
+          <p:cNvPr id="5" name="TextBox 4">
+            <a:extLst>
+              <a:ext uri="{FF2B5EF4-FFF2-40B4-BE49-F238E27FC236}">
+                <a16:creationId xmlns:a16="http://schemas.microsoft.com/office/drawing/2014/main" id="{9CF2448E-AE3D-A04D-DEAC-83B45BD3B61B}"/>
+              </a:ext>
+            </a:extLst>
+          </p:cNvPr>
+          <p:cNvSpPr txBox="1"/>
           <p:nvPr/>
-        </p:nvGrpSpPr>
-        <p:grpSpPr>
+        </p:nvSpPr>
+        <p:spPr>
           <a:xfrm>
-            <a:off x="3836275" y="4712262"/>
-            <a:ext cx="642280" cy="646331"/>
-            <a:chOff x="1008994" y="3272345"/>
-            <a:chExt cx="642280" cy="646331"/>
-          </a:xfrm>
-        </p:grpSpPr>
-        <p:sp>
-          <p:nvSpPr>
-            <p:cNvPr id="8" name="Rectangle 7">
-              <a:extLst>
-                <a:ext uri="{FF2B5EF4-FFF2-40B4-BE49-F238E27FC236}">
-                  <a16:creationId xmlns:a16="http://schemas.microsoft.com/office/drawing/2014/main" id="{24938640-4B89-1D0B-158C-B30EF32BAB73}"/>
-                </a:ext>
-              </a:extLst>
-            </p:cNvPr>
-            <p:cNvSpPr/>
-            <p:nvPr/>
-          </p:nvSpPr>
-          <p:spPr>
-            <a:xfrm>
-              <a:off x="1031164" y="3385303"/>
-              <a:ext cx="620110" cy="420413"/>
-            </a:xfrm>
-            <a:prstGeom prst="rect">
-              <a:avLst/>
-            </a:prstGeom>
-            <a:solidFill>
-              <a:schemeClr val="bg1"/>
-            </a:solidFill>
-            <a:ln>
-              <a:solidFill>
-                <a:schemeClr val="bg1"/>
-              </a:solidFill>
-            </a:ln>
-          </p:spPr>
-          <p:style>
-            <a:lnRef idx="2">
-              <a:schemeClr val="accent1">
-                <a:shade val="15000"/>
-              </a:schemeClr>
-            </a:lnRef>
-            <a:fillRef idx="1">
-              <a:schemeClr val="accent1"/>
-            </a:fillRef>
-            <a:effectRef idx="0">
-              <a:schemeClr val="accent1"/>
-            </a:effectRef>
-            <a:fontRef idx="minor">
-              <a:schemeClr val="lt1"/>
-            </a:fontRef>
-          </p:style>
-          <p:txBody>
-            <a:bodyPr rtlCol="0" anchor="ctr"/>
-            <a:lstStyle/>
-            <a:p>
-              <a:pPr algn="ctr"/>
-              <a:endParaRPr lang="en-US"/>
-            </a:p>
-          </p:txBody>
-        </p:sp>
-        <p:sp>
-          <p:nvSpPr>
-            <p:cNvPr id="9" name="TextBox 8">
-              <a:extLst>
-                <a:ext uri="{FF2B5EF4-FFF2-40B4-BE49-F238E27FC236}">
-                  <a16:creationId xmlns:a16="http://schemas.microsoft.com/office/drawing/2014/main" id="{560F9579-A921-D8F9-96E2-68CFA2748572}"/>
-                </a:ext>
-              </a:extLst>
-            </p:cNvPr>
-            <p:cNvSpPr txBox="1"/>
-            <p:nvPr/>
-          </p:nvSpPr>
-          <p:spPr>
-            <a:xfrm>
-              <a:off x="1008994" y="3272345"/>
-              <a:ext cx="620110" cy="646331"/>
-            </a:xfrm>
-            <a:prstGeom prst="rect">
-              <a:avLst/>
-            </a:prstGeom>
-            <a:noFill/>
-          </p:spPr>
-          <p:txBody>
-            <a:bodyPr wrap="square" rtlCol="0">
-              <a:spAutoFit/>
-            </a:bodyPr>
-            <a:lstStyle/>
-            <a:p>
-              <a:r>
-                <a:rPr lang="en-US" sz="3600" dirty="0"/>
-                <a:t>L2</a:t>
-              </a:r>
-            </a:p>
-          </p:txBody>
-        </p:sp>
-      </p:grpSp>
-      <p:grpSp>
-        <p:nvGrpSpPr>
-          <p:cNvPr id="10" name="Group 9">
-            <a:extLst>
-              <a:ext uri="{FF2B5EF4-FFF2-40B4-BE49-F238E27FC236}">
-                <a16:creationId xmlns:a16="http://schemas.microsoft.com/office/drawing/2014/main" id="{2468C70E-9C4E-99E7-5713-A3C8EA72B2D7}"/>
-              </a:ext>
-            </a:extLst>
-          </p:cNvPr>
-          <p:cNvGrpSpPr/>
+            <a:off x="8516303" y="5694811"/>
+            <a:ext cx="1678329" cy="369332"/>
+          </a:xfrm>
+          <a:prstGeom prst="rect">
+            <a:avLst/>
+          </a:prstGeom>
+          <a:noFill/>
+        </p:spPr>
+        <p:txBody>
+          <a:bodyPr wrap="square" rtlCol="0">
+            <a:spAutoFit/>
+          </a:bodyPr>
+          <a:lstStyle/>
+          <a:p>
+            <a:r>
+              <a:rPr lang="en-US" u="sng" dirty="0"/>
+              <a:t>result</a:t>
+            </a:r>
+            <a:r>
+              <a:rPr lang="en-US" dirty="0"/>
+              <a:t> will be?</a:t>
+            </a:r>
+          </a:p>
+        </p:txBody>
+      </p:sp>
+      <p:cxnSp>
+        <p:nvCxnSpPr>
+          <p:cNvPr id="7" name="Straight Connector 6">
+            <a:extLst>
+              <a:ext uri="{FF2B5EF4-FFF2-40B4-BE49-F238E27FC236}">
+                <a16:creationId xmlns:a16="http://schemas.microsoft.com/office/drawing/2014/main" id="{E22D1A9F-C611-23B1-5A5D-BAADB25CB1D3}"/>
+              </a:ext>
+            </a:extLst>
+          </p:cNvPr>
+          <p:cNvCxnSpPr>
+            <a:cxnSpLocks/>
+            <a:endCxn id="3" idx="1"/>
+          </p:cNvCxnSpPr>
           <p:nvPr/>
-        </p:nvGrpSpPr>
-        <p:grpSpPr>
+        </p:nvCxnSpPr>
+        <p:spPr>
+          <a:xfrm flipV="1">
+            <a:off x="7798676" y="2205270"/>
+            <a:ext cx="717627" cy="413136"/>
+          </a:xfrm>
+          <a:prstGeom prst="line">
+            <a:avLst/>
+          </a:prstGeom>
+          <a:ln w="28575"/>
+        </p:spPr>
+        <p:style>
+          <a:lnRef idx="1">
+            <a:schemeClr val="accent1"/>
+          </a:lnRef>
+          <a:fillRef idx="0">
+            <a:schemeClr val="accent1"/>
+          </a:fillRef>
+          <a:effectRef idx="0">
+            <a:schemeClr val="accent1"/>
+          </a:effectRef>
+          <a:fontRef idx="minor">
+            <a:schemeClr val="tx1"/>
+          </a:fontRef>
+        </p:style>
+      </p:cxnSp>
+      <p:cxnSp>
+        <p:nvCxnSpPr>
+          <p:cNvPr id="9" name="Straight Connector 8">
+            <a:extLst>
+              <a:ext uri="{FF2B5EF4-FFF2-40B4-BE49-F238E27FC236}">
+                <a16:creationId xmlns:a16="http://schemas.microsoft.com/office/drawing/2014/main" id="{5B16FA62-F8EB-5CCE-A2D3-01E18C05AF99}"/>
+              </a:ext>
+            </a:extLst>
+          </p:cNvPr>
+          <p:cNvCxnSpPr>
+            <a:cxnSpLocks/>
+            <a:endCxn id="4" idx="1"/>
+          </p:cNvCxnSpPr>
+          <p:nvPr/>
+        </p:nvCxnSpPr>
+        <p:spPr>
+          <a:xfrm flipV="1">
+            <a:off x="7704083" y="4210933"/>
+            <a:ext cx="812220" cy="225720"/>
+          </a:xfrm>
+          <a:prstGeom prst="line">
+            <a:avLst/>
+          </a:prstGeom>
+          <a:ln w="28575"/>
+        </p:spPr>
+        <p:style>
+          <a:lnRef idx="1">
+            <a:schemeClr val="accent1"/>
+          </a:lnRef>
+          <a:fillRef idx="0">
+            <a:schemeClr val="accent1"/>
+          </a:fillRef>
+          <a:effectRef idx="0">
+            <a:schemeClr val="accent1"/>
+          </a:effectRef>
+          <a:fontRef idx="minor">
+            <a:schemeClr val="tx1"/>
+          </a:fontRef>
+        </p:style>
+      </p:cxnSp>
+      <p:cxnSp>
+        <p:nvCxnSpPr>
+          <p:cNvPr id="11" name="Straight Connector 10">
+            <a:extLst>
+              <a:ext uri="{FF2B5EF4-FFF2-40B4-BE49-F238E27FC236}">
+                <a16:creationId xmlns:a16="http://schemas.microsoft.com/office/drawing/2014/main" id="{7F891C00-CB08-EEB3-CCFC-267A418ACA19}"/>
+              </a:ext>
+            </a:extLst>
+          </p:cNvPr>
+          <p:cNvCxnSpPr>
+            <a:cxnSpLocks/>
+            <a:endCxn id="5" idx="1"/>
+          </p:cNvCxnSpPr>
+          <p:nvPr/>
+        </p:nvCxnSpPr>
+        <p:spPr>
           <a:xfrm>
-            <a:off x="5077644" y="4712262"/>
-            <a:ext cx="642280" cy="646331"/>
-            <a:chOff x="1008994" y="3272345"/>
-            <a:chExt cx="642280" cy="646331"/>
-          </a:xfrm>
-        </p:grpSpPr>
-        <p:sp>
-          <p:nvSpPr>
-            <p:cNvPr id="11" name="Rectangle 10">
-              <a:extLst>
-                <a:ext uri="{FF2B5EF4-FFF2-40B4-BE49-F238E27FC236}">
-                  <a16:creationId xmlns:a16="http://schemas.microsoft.com/office/drawing/2014/main" id="{039B6D1B-C961-D06B-C5AA-75B5F5BC9661}"/>
-                </a:ext>
-              </a:extLst>
-            </p:cNvPr>
-            <p:cNvSpPr/>
-            <p:nvPr/>
-          </p:nvSpPr>
-          <p:spPr>
-            <a:xfrm>
-              <a:off x="1031164" y="3385303"/>
-              <a:ext cx="620110" cy="420413"/>
-            </a:xfrm>
-            <a:prstGeom prst="rect">
-              <a:avLst/>
-            </a:prstGeom>
-            <a:solidFill>
-              <a:schemeClr val="bg1"/>
-            </a:solidFill>
-            <a:ln>
-              <a:solidFill>
-                <a:schemeClr val="bg1"/>
-              </a:solidFill>
-            </a:ln>
-          </p:spPr>
-          <p:style>
-            <a:lnRef idx="2">
-              <a:schemeClr val="accent1">
-                <a:shade val="15000"/>
-              </a:schemeClr>
-            </a:lnRef>
-            <a:fillRef idx="1">
-              <a:schemeClr val="accent1"/>
-            </a:fillRef>
-            <a:effectRef idx="0">
-              <a:schemeClr val="accent1"/>
-            </a:effectRef>
-            <a:fontRef idx="minor">
-              <a:schemeClr val="lt1"/>
-            </a:fontRef>
-          </p:style>
-          <p:txBody>
-            <a:bodyPr rtlCol="0" anchor="ctr"/>
-            <a:lstStyle/>
-            <a:p>
-              <a:pPr algn="ctr"/>
-              <a:endParaRPr lang="en-US"/>
-            </a:p>
-          </p:txBody>
-        </p:sp>
-        <p:sp>
-          <p:nvSpPr>
-            <p:cNvPr id="12" name="TextBox 11">
-              <a:extLst>
-                <a:ext uri="{FF2B5EF4-FFF2-40B4-BE49-F238E27FC236}">
-                  <a16:creationId xmlns:a16="http://schemas.microsoft.com/office/drawing/2014/main" id="{AF01F5DA-074E-0A6B-14CD-2D8A192FC3D8}"/>
-                </a:ext>
-              </a:extLst>
-            </p:cNvPr>
-            <p:cNvSpPr txBox="1"/>
-            <p:nvPr/>
-          </p:nvSpPr>
-          <p:spPr>
-            <a:xfrm>
-              <a:off x="1008994" y="3272345"/>
-              <a:ext cx="620110" cy="646331"/>
-            </a:xfrm>
-            <a:prstGeom prst="rect">
-              <a:avLst/>
-            </a:prstGeom>
-            <a:noFill/>
-          </p:spPr>
-          <p:txBody>
-            <a:bodyPr wrap="square" rtlCol="0">
-              <a:spAutoFit/>
-            </a:bodyPr>
-            <a:lstStyle/>
-            <a:p>
-              <a:r>
-                <a:rPr lang="en-US" sz="3600" dirty="0"/>
-                <a:t>L3</a:t>
-              </a:r>
-            </a:p>
-          </p:txBody>
-        </p:sp>
-      </p:grpSp>
-      <p:grpSp>
-        <p:nvGrpSpPr>
-          <p:cNvPr id="13" name="Group 12">
-            <a:extLst>
-              <a:ext uri="{FF2B5EF4-FFF2-40B4-BE49-F238E27FC236}">
-                <a16:creationId xmlns:a16="http://schemas.microsoft.com/office/drawing/2014/main" id="{BF3F4255-AC20-99EE-6C9E-C45C396F6F8A}"/>
-              </a:ext>
-            </a:extLst>
-          </p:cNvPr>
-          <p:cNvGrpSpPr/>
+            <a:off x="7220607" y="4930821"/>
+            <a:ext cx="1295696" cy="948656"/>
+          </a:xfrm>
+          <a:prstGeom prst="line">
+            <a:avLst/>
+          </a:prstGeom>
+          <a:ln w="28575"/>
+        </p:spPr>
+        <p:style>
+          <a:lnRef idx="1">
+            <a:schemeClr val="accent1"/>
+          </a:lnRef>
+          <a:fillRef idx="0">
+            <a:schemeClr val="accent1"/>
+          </a:fillRef>
+          <a:effectRef idx="0">
+            <a:schemeClr val="accent1"/>
+          </a:effectRef>
+          <a:fontRef idx="minor">
+            <a:schemeClr val="tx1"/>
+          </a:fontRef>
+        </p:style>
+      </p:cxnSp>
+      <p:pic>
+        <p:nvPicPr>
+          <p:cNvPr id="6" name="Picture 5">
+            <a:extLst>
+              <a:ext uri="{FF2B5EF4-FFF2-40B4-BE49-F238E27FC236}">
+                <a16:creationId xmlns:a16="http://schemas.microsoft.com/office/drawing/2014/main" id="{71F30E0D-70A8-CD17-3613-C0B996EF2838}"/>
+              </a:ext>
+            </a:extLst>
+          </p:cNvPr>
+          <p:cNvPicPr>
+            <a:picLocks noChangeAspect="1"/>
+          </p:cNvPicPr>
           <p:nvPr/>
-        </p:nvGrpSpPr>
-        <p:grpSpPr>
+        </p:nvPicPr>
+        <p:blipFill>
+          <a:blip r:embed="rId3"/>
+          <a:stretch>
+            <a:fillRect/>
+          </a:stretch>
+        </p:blipFill>
+        <p:spPr>
           <a:xfrm>
-            <a:off x="6421821" y="3613931"/>
-            <a:ext cx="642280" cy="646331"/>
-            <a:chOff x="1008994" y="3272345"/>
-            <a:chExt cx="642280" cy="646331"/>
-          </a:xfrm>
-        </p:grpSpPr>
-        <p:sp>
-          <p:nvSpPr>
-            <p:cNvPr id="14" name="Rectangle 13">
-              <a:extLst>
-                <a:ext uri="{FF2B5EF4-FFF2-40B4-BE49-F238E27FC236}">
-                  <a16:creationId xmlns:a16="http://schemas.microsoft.com/office/drawing/2014/main" id="{C68EE4B0-E818-039E-24C2-FAD6C311A4AB}"/>
-                </a:ext>
-              </a:extLst>
-            </p:cNvPr>
-            <p:cNvSpPr/>
-            <p:nvPr/>
-          </p:nvSpPr>
-          <p:spPr>
-            <a:xfrm>
-              <a:off x="1031164" y="3385303"/>
-              <a:ext cx="620110" cy="420413"/>
-            </a:xfrm>
-            <a:prstGeom prst="rect">
-              <a:avLst/>
-            </a:prstGeom>
-            <a:solidFill>
-              <a:schemeClr val="bg1"/>
-            </a:solidFill>
-            <a:ln>
-              <a:solidFill>
-                <a:schemeClr val="bg1"/>
-              </a:solidFill>
-            </a:ln>
-          </p:spPr>
-          <p:style>
-            <a:lnRef idx="2">
-              <a:schemeClr val="accent1">
-                <a:shade val="15000"/>
-              </a:schemeClr>
-            </a:lnRef>
-            <a:fillRef idx="1">
-              <a:schemeClr val="accent1"/>
-            </a:fillRef>
-            <a:effectRef idx="0">
-              <a:schemeClr val="accent1"/>
-            </a:effectRef>
-            <a:fontRef idx="minor">
-              <a:schemeClr val="lt1"/>
-            </a:fontRef>
-          </p:style>
-          <p:txBody>
-            <a:bodyPr rtlCol="0" anchor="ctr"/>
-            <a:lstStyle/>
-            <a:p>
-              <a:pPr algn="ctr"/>
-              <a:endParaRPr lang="en-US"/>
-            </a:p>
-          </p:txBody>
-        </p:sp>
-        <p:sp>
-          <p:nvSpPr>
-            <p:cNvPr id="15" name="TextBox 14">
-              <a:extLst>
-                <a:ext uri="{FF2B5EF4-FFF2-40B4-BE49-F238E27FC236}">
-                  <a16:creationId xmlns:a16="http://schemas.microsoft.com/office/drawing/2014/main" id="{AF9D80FE-7029-E9F8-F125-E060A7048F8C}"/>
-                </a:ext>
-              </a:extLst>
-            </p:cNvPr>
-            <p:cNvSpPr txBox="1"/>
-            <p:nvPr/>
-          </p:nvSpPr>
-          <p:spPr>
-            <a:xfrm>
-              <a:off x="1008994" y="3272345"/>
-              <a:ext cx="620110" cy="646331"/>
-            </a:xfrm>
-            <a:prstGeom prst="rect">
-              <a:avLst/>
-            </a:prstGeom>
-            <a:noFill/>
-          </p:spPr>
-          <p:txBody>
-            <a:bodyPr wrap="square" rtlCol="0">
-              <a:spAutoFit/>
-            </a:bodyPr>
-            <a:lstStyle/>
-            <a:p>
-              <a:r>
-                <a:rPr lang="en-US" sz="3600" dirty="0"/>
-                <a:t>L4</a:t>
-              </a:r>
-            </a:p>
-          </p:txBody>
-        </p:sp>
-      </p:grpSp>
-      <p:grpSp>
-        <p:nvGrpSpPr>
-          <p:cNvPr id="16" name="Group 15">
-            <a:extLst>
-              <a:ext uri="{FF2B5EF4-FFF2-40B4-BE49-F238E27FC236}">
-                <a16:creationId xmlns:a16="http://schemas.microsoft.com/office/drawing/2014/main" id="{90289D04-15EC-3D07-C744-239904BFBBDA}"/>
-              </a:ext>
-            </a:extLst>
-          </p:cNvPr>
-          <p:cNvGrpSpPr/>
-          <p:nvPr/>
-        </p:nvGrpSpPr>
-        <p:grpSpPr>
-          <a:xfrm>
-            <a:off x="7698828" y="3613931"/>
-            <a:ext cx="642280" cy="646331"/>
-            <a:chOff x="1008994" y="3272345"/>
-            <a:chExt cx="642280" cy="646331"/>
-          </a:xfrm>
-        </p:grpSpPr>
-        <p:sp>
-          <p:nvSpPr>
-            <p:cNvPr id="17" name="Rectangle 16">
-              <a:extLst>
-                <a:ext uri="{FF2B5EF4-FFF2-40B4-BE49-F238E27FC236}">
-                  <a16:creationId xmlns:a16="http://schemas.microsoft.com/office/drawing/2014/main" id="{CA6AAE31-0D2C-1E99-01D9-05BA87417D80}"/>
-                </a:ext>
-              </a:extLst>
-            </p:cNvPr>
-            <p:cNvSpPr/>
-            <p:nvPr/>
-          </p:nvSpPr>
-          <p:spPr>
-            <a:xfrm>
-              <a:off x="1031164" y="3385303"/>
-              <a:ext cx="620110" cy="420413"/>
-            </a:xfrm>
-            <a:prstGeom prst="rect">
-              <a:avLst/>
-            </a:prstGeom>
-            <a:solidFill>
-              <a:schemeClr val="bg1"/>
-            </a:solidFill>
-            <a:ln>
-              <a:solidFill>
-                <a:schemeClr val="bg1"/>
-              </a:solidFill>
-            </a:ln>
-          </p:spPr>
-          <p:style>
-            <a:lnRef idx="2">
-              <a:schemeClr val="accent1">
-                <a:shade val="15000"/>
-              </a:schemeClr>
-            </a:lnRef>
-            <a:fillRef idx="1">
-              <a:schemeClr val="accent1"/>
-            </a:fillRef>
-            <a:effectRef idx="0">
-              <a:schemeClr val="accent1"/>
-            </a:effectRef>
-            <a:fontRef idx="minor">
-              <a:schemeClr val="lt1"/>
-            </a:fontRef>
-          </p:style>
-          <p:txBody>
-            <a:bodyPr rtlCol="0" anchor="ctr"/>
-            <a:lstStyle/>
-            <a:p>
-              <a:pPr algn="ctr"/>
-              <a:endParaRPr lang="en-US"/>
-            </a:p>
-          </p:txBody>
-        </p:sp>
-        <p:sp>
-          <p:nvSpPr>
-            <p:cNvPr id="18" name="TextBox 17">
-              <a:extLst>
-                <a:ext uri="{FF2B5EF4-FFF2-40B4-BE49-F238E27FC236}">
-                  <a16:creationId xmlns:a16="http://schemas.microsoft.com/office/drawing/2014/main" id="{8D184F32-F129-3D35-539F-5A07C60B6B6E}"/>
-                </a:ext>
-              </a:extLst>
-            </p:cNvPr>
-            <p:cNvSpPr txBox="1"/>
-            <p:nvPr/>
-          </p:nvSpPr>
-          <p:spPr>
-            <a:xfrm>
-              <a:off x="1008994" y="3272345"/>
-              <a:ext cx="620110" cy="646331"/>
-            </a:xfrm>
-            <a:prstGeom prst="rect">
-              <a:avLst/>
-            </a:prstGeom>
-            <a:noFill/>
-          </p:spPr>
-          <p:txBody>
-            <a:bodyPr wrap="square" rtlCol="0">
-              <a:spAutoFit/>
-            </a:bodyPr>
-            <a:lstStyle/>
-            <a:p>
-              <a:r>
-                <a:rPr lang="en-US" sz="3600" dirty="0"/>
-                <a:t>L5</a:t>
-              </a:r>
-            </a:p>
-          </p:txBody>
-        </p:sp>
-      </p:grpSp>
-      <p:grpSp>
-        <p:nvGrpSpPr>
-          <p:cNvPr id="19" name="Group 18">
-            <a:extLst>
-              <a:ext uri="{FF2B5EF4-FFF2-40B4-BE49-F238E27FC236}">
-                <a16:creationId xmlns:a16="http://schemas.microsoft.com/office/drawing/2014/main" id="{0A938B1B-DF42-7E3B-43EE-39CD80D9C5E4}"/>
-              </a:ext>
-            </a:extLst>
-          </p:cNvPr>
-          <p:cNvGrpSpPr/>
-          <p:nvPr/>
-        </p:nvGrpSpPr>
-        <p:grpSpPr>
-          <a:xfrm>
-            <a:off x="9032984" y="3613929"/>
-            <a:ext cx="642280" cy="646331"/>
-            <a:chOff x="1008994" y="3272345"/>
-            <a:chExt cx="642280" cy="646331"/>
-          </a:xfrm>
-        </p:grpSpPr>
-        <p:sp>
-          <p:nvSpPr>
-            <p:cNvPr id="20" name="Rectangle 19">
-              <a:extLst>
-                <a:ext uri="{FF2B5EF4-FFF2-40B4-BE49-F238E27FC236}">
-                  <a16:creationId xmlns:a16="http://schemas.microsoft.com/office/drawing/2014/main" id="{22F642AD-C092-722D-5B5E-625305FB5A42}"/>
-                </a:ext>
-              </a:extLst>
-            </p:cNvPr>
-            <p:cNvSpPr/>
-            <p:nvPr/>
-          </p:nvSpPr>
-          <p:spPr>
-            <a:xfrm>
-              <a:off x="1031164" y="3385303"/>
-              <a:ext cx="620110" cy="420413"/>
-            </a:xfrm>
-            <a:prstGeom prst="rect">
-              <a:avLst/>
-            </a:prstGeom>
-            <a:solidFill>
-              <a:schemeClr val="bg1"/>
-            </a:solidFill>
-            <a:ln>
-              <a:solidFill>
-                <a:schemeClr val="bg1"/>
-              </a:solidFill>
-            </a:ln>
-          </p:spPr>
-          <p:style>
-            <a:lnRef idx="2">
-              <a:schemeClr val="accent1">
-                <a:shade val="15000"/>
-              </a:schemeClr>
-            </a:lnRef>
-            <a:fillRef idx="1">
-              <a:schemeClr val="accent1"/>
-            </a:fillRef>
-            <a:effectRef idx="0">
-              <a:schemeClr val="accent1"/>
-            </a:effectRef>
-            <a:fontRef idx="minor">
-              <a:schemeClr val="lt1"/>
-            </a:fontRef>
-          </p:style>
-          <p:txBody>
-            <a:bodyPr rtlCol="0" anchor="ctr"/>
-            <a:lstStyle/>
-            <a:p>
-              <a:pPr algn="ctr"/>
-              <a:endParaRPr lang="en-US"/>
-            </a:p>
-          </p:txBody>
-        </p:sp>
-        <p:sp>
-          <p:nvSpPr>
-            <p:cNvPr id="21" name="TextBox 20">
-              <a:extLst>
-                <a:ext uri="{FF2B5EF4-FFF2-40B4-BE49-F238E27FC236}">
-                  <a16:creationId xmlns:a16="http://schemas.microsoft.com/office/drawing/2014/main" id="{188C435D-9083-E476-67B5-5CFD82943D5F}"/>
-                </a:ext>
-              </a:extLst>
-            </p:cNvPr>
-            <p:cNvSpPr txBox="1"/>
-            <p:nvPr/>
-          </p:nvSpPr>
-          <p:spPr>
-            <a:xfrm>
-              <a:off x="1008994" y="3272345"/>
-              <a:ext cx="620110" cy="646331"/>
-            </a:xfrm>
-            <a:prstGeom prst="rect">
-              <a:avLst/>
-            </a:prstGeom>
-            <a:noFill/>
-          </p:spPr>
-          <p:txBody>
-            <a:bodyPr wrap="square" rtlCol="0">
-              <a:spAutoFit/>
-            </a:bodyPr>
-            <a:lstStyle/>
-            <a:p>
-              <a:r>
-                <a:rPr lang="en-US" sz="3600" dirty="0"/>
-                <a:t>L6</a:t>
-              </a:r>
-            </a:p>
-          </p:txBody>
-        </p:sp>
-      </p:grpSp>
-      <p:grpSp>
-        <p:nvGrpSpPr>
-          <p:cNvPr id="22" name="Group 21">
-            <a:extLst>
-              <a:ext uri="{FF2B5EF4-FFF2-40B4-BE49-F238E27FC236}">
-                <a16:creationId xmlns:a16="http://schemas.microsoft.com/office/drawing/2014/main" id="{45F50AFC-2FFB-D8C8-DB84-0AAE3DCF9B48}"/>
-              </a:ext>
-            </a:extLst>
-          </p:cNvPr>
-          <p:cNvGrpSpPr/>
-          <p:nvPr/>
-        </p:nvGrpSpPr>
-        <p:grpSpPr>
-          <a:xfrm>
-            <a:off x="3778467" y="3639448"/>
-            <a:ext cx="735725" cy="646331"/>
-            <a:chOff x="951186" y="3272343"/>
-            <a:chExt cx="735725" cy="646331"/>
-          </a:xfrm>
-        </p:grpSpPr>
-        <p:sp>
-          <p:nvSpPr>
-            <p:cNvPr id="23" name="Rectangle 22">
-              <a:extLst>
-                <a:ext uri="{FF2B5EF4-FFF2-40B4-BE49-F238E27FC236}">
-                  <a16:creationId xmlns:a16="http://schemas.microsoft.com/office/drawing/2014/main" id="{63051964-F230-3C36-E08B-9AEAFCFC5E94}"/>
-                </a:ext>
-              </a:extLst>
-            </p:cNvPr>
-            <p:cNvSpPr/>
-            <p:nvPr/>
-          </p:nvSpPr>
-          <p:spPr>
-            <a:xfrm>
-              <a:off x="1031164" y="3385303"/>
-              <a:ext cx="620110" cy="420413"/>
-            </a:xfrm>
-            <a:prstGeom prst="rect">
-              <a:avLst/>
-            </a:prstGeom>
-            <a:solidFill>
-              <a:schemeClr val="bg1"/>
-            </a:solidFill>
-            <a:ln>
-              <a:solidFill>
-                <a:schemeClr val="bg1"/>
-              </a:solidFill>
-            </a:ln>
-          </p:spPr>
-          <p:style>
-            <a:lnRef idx="2">
-              <a:schemeClr val="accent1">
-                <a:shade val="15000"/>
-              </a:schemeClr>
-            </a:lnRef>
-            <a:fillRef idx="1">
-              <a:schemeClr val="accent1"/>
-            </a:fillRef>
-            <a:effectRef idx="0">
-              <a:schemeClr val="accent1"/>
-            </a:effectRef>
-            <a:fontRef idx="minor">
-              <a:schemeClr val="lt1"/>
-            </a:fontRef>
-          </p:style>
-          <p:txBody>
-            <a:bodyPr rtlCol="0" anchor="ctr"/>
-            <a:lstStyle/>
-            <a:p>
-              <a:pPr algn="ctr"/>
-              <a:endParaRPr lang="en-US"/>
-            </a:p>
-          </p:txBody>
-        </p:sp>
-        <p:sp>
-          <p:nvSpPr>
-            <p:cNvPr id="24" name="TextBox 23">
-              <a:extLst>
-                <a:ext uri="{FF2B5EF4-FFF2-40B4-BE49-F238E27FC236}">
-                  <a16:creationId xmlns:a16="http://schemas.microsoft.com/office/drawing/2014/main" id="{487E55E0-7433-C476-379A-1D28B671EAD0}"/>
-                </a:ext>
-              </a:extLst>
-            </p:cNvPr>
-            <p:cNvSpPr txBox="1"/>
-            <p:nvPr/>
-          </p:nvSpPr>
-          <p:spPr>
-            <a:xfrm>
-              <a:off x="951186" y="3272343"/>
-              <a:ext cx="735725" cy="646331"/>
-            </a:xfrm>
-            <a:prstGeom prst="rect">
-              <a:avLst/>
-            </a:prstGeom>
-            <a:noFill/>
-          </p:spPr>
-          <p:txBody>
-            <a:bodyPr wrap="square" rtlCol="0">
-              <a:spAutoFit/>
-            </a:bodyPr>
-            <a:lstStyle/>
-            <a:p>
-              <a:pPr algn="ctr"/>
-              <a:r>
-                <a:rPr lang="en-US" sz="3600" dirty="0"/>
-                <a:t>I1</a:t>
-              </a:r>
-            </a:p>
-          </p:txBody>
-        </p:sp>
-      </p:grpSp>
-      <p:grpSp>
-        <p:nvGrpSpPr>
-          <p:cNvPr id="26" name="Group 25">
-            <a:extLst>
-              <a:ext uri="{FF2B5EF4-FFF2-40B4-BE49-F238E27FC236}">
-                <a16:creationId xmlns:a16="http://schemas.microsoft.com/office/drawing/2014/main" id="{532C7A2A-D723-6AD8-3290-2076D88B5DDE}"/>
-              </a:ext>
-            </a:extLst>
-          </p:cNvPr>
-          <p:cNvGrpSpPr/>
-          <p:nvPr/>
-        </p:nvGrpSpPr>
-        <p:grpSpPr>
-          <a:xfrm>
-            <a:off x="4442918" y="2595236"/>
-            <a:ext cx="735725" cy="646331"/>
-            <a:chOff x="951186" y="3272343"/>
-            <a:chExt cx="735725" cy="646331"/>
-          </a:xfrm>
-        </p:grpSpPr>
-        <p:sp>
-          <p:nvSpPr>
-            <p:cNvPr id="27" name="Rectangle 26">
-              <a:extLst>
-                <a:ext uri="{FF2B5EF4-FFF2-40B4-BE49-F238E27FC236}">
-                  <a16:creationId xmlns:a16="http://schemas.microsoft.com/office/drawing/2014/main" id="{BB831551-70EA-07B7-BAC9-F60AD098BF7B}"/>
-                </a:ext>
-              </a:extLst>
-            </p:cNvPr>
-            <p:cNvSpPr/>
-            <p:nvPr/>
-          </p:nvSpPr>
-          <p:spPr>
-            <a:xfrm>
-              <a:off x="1031164" y="3385303"/>
-              <a:ext cx="620110" cy="420413"/>
-            </a:xfrm>
-            <a:prstGeom prst="rect">
-              <a:avLst/>
-            </a:prstGeom>
-            <a:solidFill>
-              <a:schemeClr val="bg1"/>
-            </a:solidFill>
-            <a:ln>
-              <a:solidFill>
-                <a:schemeClr val="bg1"/>
-              </a:solidFill>
-            </a:ln>
-          </p:spPr>
-          <p:style>
-            <a:lnRef idx="2">
-              <a:schemeClr val="accent1">
-                <a:shade val="15000"/>
-              </a:schemeClr>
-            </a:lnRef>
-            <a:fillRef idx="1">
-              <a:schemeClr val="accent1"/>
-            </a:fillRef>
-            <a:effectRef idx="0">
-              <a:schemeClr val="accent1"/>
-            </a:effectRef>
-            <a:fontRef idx="minor">
-              <a:schemeClr val="lt1"/>
-            </a:fontRef>
-          </p:style>
-          <p:txBody>
-            <a:bodyPr rtlCol="0" anchor="ctr"/>
-            <a:lstStyle/>
-            <a:p>
-              <a:pPr algn="ctr"/>
-              <a:endParaRPr lang="en-US"/>
-            </a:p>
-          </p:txBody>
-        </p:sp>
-        <p:sp>
-          <p:nvSpPr>
-            <p:cNvPr id="28" name="TextBox 27">
-              <a:extLst>
-                <a:ext uri="{FF2B5EF4-FFF2-40B4-BE49-F238E27FC236}">
-                  <a16:creationId xmlns:a16="http://schemas.microsoft.com/office/drawing/2014/main" id="{09FBBB9F-776C-F22C-0141-E38D280B3740}"/>
-                </a:ext>
-              </a:extLst>
-            </p:cNvPr>
-            <p:cNvSpPr txBox="1"/>
-            <p:nvPr/>
-          </p:nvSpPr>
-          <p:spPr>
-            <a:xfrm>
-              <a:off x="951186" y="3272343"/>
-              <a:ext cx="735725" cy="646331"/>
-            </a:xfrm>
-            <a:prstGeom prst="rect">
-              <a:avLst/>
-            </a:prstGeom>
-            <a:noFill/>
-          </p:spPr>
-          <p:txBody>
-            <a:bodyPr wrap="square" rtlCol="0">
-              <a:spAutoFit/>
-            </a:bodyPr>
-            <a:lstStyle/>
-            <a:p>
-              <a:pPr algn="ctr"/>
-              <a:r>
-                <a:rPr lang="en-US" sz="3600" dirty="0"/>
-                <a:t>I2</a:t>
-              </a:r>
-            </a:p>
-          </p:txBody>
-        </p:sp>
-      </p:grpSp>
-      <p:grpSp>
-        <p:nvGrpSpPr>
-          <p:cNvPr id="29" name="Group 28">
-            <a:extLst>
-              <a:ext uri="{FF2B5EF4-FFF2-40B4-BE49-F238E27FC236}">
-                <a16:creationId xmlns:a16="http://schemas.microsoft.com/office/drawing/2014/main" id="{3B1D6B3E-0286-E41A-5F3A-91A13F7F3355}"/>
-              </a:ext>
-            </a:extLst>
-          </p:cNvPr>
-          <p:cNvGrpSpPr/>
-          <p:nvPr/>
-        </p:nvGrpSpPr>
-        <p:grpSpPr>
-          <a:xfrm>
-            <a:off x="8311875" y="2587954"/>
-            <a:ext cx="735725" cy="646331"/>
-            <a:chOff x="951186" y="3272343"/>
-            <a:chExt cx="735725" cy="646331"/>
-          </a:xfrm>
-        </p:grpSpPr>
-        <p:sp>
-          <p:nvSpPr>
-            <p:cNvPr id="30" name="Rectangle 29">
-              <a:extLst>
-                <a:ext uri="{FF2B5EF4-FFF2-40B4-BE49-F238E27FC236}">
-                  <a16:creationId xmlns:a16="http://schemas.microsoft.com/office/drawing/2014/main" id="{C98493CB-022D-F1A6-4D4F-DF5BBED5AE80}"/>
-                </a:ext>
-              </a:extLst>
-            </p:cNvPr>
-            <p:cNvSpPr/>
-            <p:nvPr/>
-          </p:nvSpPr>
-          <p:spPr>
-            <a:xfrm>
-              <a:off x="1031164" y="3385303"/>
-              <a:ext cx="620110" cy="420413"/>
-            </a:xfrm>
-            <a:prstGeom prst="rect">
-              <a:avLst/>
-            </a:prstGeom>
-            <a:solidFill>
-              <a:schemeClr val="bg1"/>
-            </a:solidFill>
-            <a:ln>
-              <a:solidFill>
-                <a:schemeClr val="bg1"/>
-              </a:solidFill>
-            </a:ln>
-          </p:spPr>
-          <p:style>
-            <a:lnRef idx="2">
-              <a:schemeClr val="accent1">
-                <a:shade val="15000"/>
-              </a:schemeClr>
-            </a:lnRef>
-            <a:fillRef idx="1">
-              <a:schemeClr val="accent1"/>
-            </a:fillRef>
-            <a:effectRef idx="0">
-              <a:schemeClr val="accent1"/>
-            </a:effectRef>
-            <a:fontRef idx="minor">
-              <a:schemeClr val="lt1"/>
-            </a:fontRef>
-          </p:style>
-          <p:txBody>
-            <a:bodyPr rtlCol="0" anchor="ctr"/>
-            <a:lstStyle/>
-            <a:p>
-              <a:pPr algn="ctr"/>
-              <a:endParaRPr lang="en-US"/>
-            </a:p>
-          </p:txBody>
-        </p:sp>
-        <p:sp>
-          <p:nvSpPr>
-            <p:cNvPr id="31" name="TextBox 30">
-              <a:extLst>
-                <a:ext uri="{FF2B5EF4-FFF2-40B4-BE49-F238E27FC236}">
-                  <a16:creationId xmlns:a16="http://schemas.microsoft.com/office/drawing/2014/main" id="{B425002F-873B-FABB-E7F3-46FF8896B5B5}"/>
-                </a:ext>
-              </a:extLst>
-            </p:cNvPr>
-            <p:cNvSpPr txBox="1"/>
-            <p:nvPr/>
-          </p:nvSpPr>
-          <p:spPr>
-            <a:xfrm>
-              <a:off x="951186" y="3272343"/>
-              <a:ext cx="735725" cy="646331"/>
-            </a:xfrm>
-            <a:prstGeom prst="rect">
-              <a:avLst/>
-            </a:prstGeom>
-            <a:noFill/>
-          </p:spPr>
-          <p:txBody>
-            <a:bodyPr wrap="square" rtlCol="0">
-              <a:spAutoFit/>
-            </a:bodyPr>
-            <a:lstStyle/>
-            <a:p>
-              <a:pPr algn="ctr"/>
-              <a:r>
-                <a:rPr lang="en-US" sz="3600" dirty="0"/>
-                <a:t>I3</a:t>
-              </a:r>
-            </a:p>
-          </p:txBody>
-        </p:sp>
-      </p:grpSp>
-      <p:grpSp>
-        <p:nvGrpSpPr>
-          <p:cNvPr id="32" name="Group 31">
-            <a:extLst>
-              <a:ext uri="{FF2B5EF4-FFF2-40B4-BE49-F238E27FC236}">
-                <a16:creationId xmlns:a16="http://schemas.microsoft.com/office/drawing/2014/main" id="{78954D76-5241-9A96-55E3-7D58A512CCD6}"/>
-              </a:ext>
-            </a:extLst>
-          </p:cNvPr>
-          <p:cNvGrpSpPr/>
-          <p:nvPr/>
-        </p:nvGrpSpPr>
-        <p:grpSpPr>
-          <a:xfrm>
-            <a:off x="5728136" y="1490352"/>
-            <a:ext cx="735725" cy="646331"/>
-            <a:chOff x="951186" y="3272343"/>
-            <a:chExt cx="735725" cy="646331"/>
-          </a:xfrm>
-        </p:grpSpPr>
-        <p:sp>
-          <p:nvSpPr>
-            <p:cNvPr id="33" name="Rectangle 32">
-              <a:extLst>
-                <a:ext uri="{FF2B5EF4-FFF2-40B4-BE49-F238E27FC236}">
-                  <a16:creationId xmlns:a16="http://schemas.microsoft.com/office/drawing/2014/main" id="{86630802-3332-3A7A-F184-EB08C9F77B14}"/>
-                </a:ext>
-              </a:extLst>
-            </p:cNvPr>
-            <p:cNvSpPr/>
-            <p:nvPr/>
-          </p:nvSpPr>
-          <p:spPr>
-            <a:xfrm>
-              <a:off x="1031164" y="3385303"/>
-              <a:ext cx="620110" cy="420413"/>
-            </a:xfrm>
-            <a:prstGeom prst="rect">
-              <a:avLst/>
-            </a:prstGeom>
-            <a:solidFill>
-              <a:schemeClr val="bg1"/>
-            </a:solidFill>
-            <a:ln>
-              <a:solidFill>
-                <a:schemeClr val="bg1"/>
-              </a:solidFill>
-            </a:ln>
-          </p:spPr>
-          <p:style>
-            <a:lnRef idx="2">
-              <a:schemeClr val="accent1">
-                <a:shade val="15000"/>
-              </a:schemeClr>
-            </a:lnRef>
-            <a:fillRef idx="1">
-              <a:schemeClr val="accent1"/>
-            </a:fillRef>
-            <a:effectRef idx="0">
-              <a:schemeClr val="accent1"/>
-            </a:effectRef>
-            <a:fontRef idx="minor">
-              <a:schemeClr val="lt1"/>
-            </a:fontRef>
-          </p:style>
-          <p:txBody>
-            <a:bodyPr rtlCol="0" anchor="ctr"/>
-            <a:lstStyle/>
-            <a:p>
-              <a:pPr algn="ctr"/>
-              <a:endParaRPr lang="en-US"/>
-            </a:p>
-          </p:txBody>
-        </p:sp>
-        <p:sp>
-          <p:nvSpPr>
-            <p:cNvPr id="34" name="TextBox 33">
-              <a:extLst>
-                <a:ext uri="{FF2B5EF4-FFF2-40B4-BE49-F238E27FC236}">
-                  <a16:creationId xmlns:a16="http://schemas.microsoft.com/office/drawing/2014/main" id="{C90217AD-1D61-03AC-8A1B-5C12329C7DD7}"/>
-                </a:ext>
-              </a:extLst>
-            </p:cNvPr>
-            <p:cNvSpPr txBox="1"/>
-            <p:nvPr/>
-          </p:nvSpPr>
-          <p:spPr>
-            <a:xfrm>
-              <a:off x="951186" y="3272343"/>
-              <a:ext cx="735725" cy="646331"/>
-            </a:xfrm>
-            <a:prstGeom prst="rect">
-              <a:avLst/>
-            </a:prstGeom>
-            <a:noFill/>
-          </p:spPr>
-          <p:txBody>
-            <a:bodyPr wrap="square" rtlCol="0">
-              <a:spAutoFit/>
-            </a:bodyPr>
-            <a:lstStyle/>
-            <a:p>
-              <a:pPr algn="ctr"/>
-              <a:r>
-                <a:rPr lang="en-US" sz="3600" dirty="0"/>
-                <a:t>I4</a:t>
-              </a:r>
-            </a:p>
-          </p:txBody>
-        </p:sp>
-      </p:grpSp>
+            <a:off x="3262535" y="2362196"/>
+            <a:ext cx="2095500" cy="355600"/>
+          </a:xfrm>
+          <a:prstGeom prst="rect">
+            <a:avLst/>
+          </a:prstGeom>
+        </p:spPr>
+      </p:pic>
     </p:spTree>
     <p:extLst>
       <p:ext uri="{BB962C8B-B14F-4D97-AF65-F5344CB8AC3E}">
-        <p14:creationId xmlns:p14="http://schemas.microsoft.com/office/powerpoint/2010/main" val="3094537157"/>
+        <p14:creationId xmlns:p14="http://schemas.microsoft.com/office/powerpoint/2010/main" val="684187631"/>
       </p:ext>
     </p:extLst>
   </p:cSld>
@@ -4734,307 +3841,10 @@
           <a:chExt cx="0" cy="0"/>
         </a:xfrm>
       </p:grpSpPr>
-      <p:pic>
-        <p:nvPicPr>
-          <p:cNvPr id="2" name="Picture 1">
-            <a:extLst>
-              <a:ext uri="{FF2B5EF4-FFF2-40B4-BE49-F238E27FC236}">
-                <a16:creationId xmlns:a16="http://schemas.microsoft.com/office/drawing/2014/main" id="{01355307-B39A-0C53-80E2-136F412AF4FB}"/>
-              </a:ext>
-            </a:extLst>
-          </p:cNvPr>
-          <p:cNvPicPr>
-            <a:picLocks noChangeAspect="1"/>
-          </p:cNvPicPr>
-          <p:nvPr/>
-        </p:nvPicPr>
-        <p:blipFill>
-          <a:blip r:embed="rId2"/>
-          <a:stretch>
-            <a:fillRect/>
-          </a:stretch>
-        </p:blipFill>
-        <p:spPr>
-          <a:xfrm>
-            <a:off x="1376423" y="579043"/>
-            <a:ext cx="7772400" cy="4871942"/>
-          </a:xfrm>
-          <a:prstGeom prst="rect">
-            <a:avLst/>
-          </a:prstGeom>
-        </p:spPr>
-      </p:pic>
-      <p:sp>
-        <p:nvSpPr>
-          <p:cNvPr id="3" name="TextBox 2">
-            <a:extLst>
-              <a:ext uri="{FF2B5EF4-FFF2-40B4-BE49-F238E27FC236}">
-                <a16:creationId xmlns:a16="http://schemas.microsoft.com/office/drawing/2014/main" id="{A8B20AC4-A791-BEDB-3FE1-152D5F72FB62}"/>
-              </a:ext>
-            </a:extLst>
-          </p:cNvPr>
-          <p:cNvSpPr txBox="1"/>
-          <p:nvPr/>
-        </p:nvSpPr>
-        <p:spPr>
-          <a:xfrm>
-            <a:off x="8516303" y="2020604"/>
-            <a:ext cx="1678329" cy="369332"/>
-          </a:xfrm>
-          <a:prstGeom prst="rect">
-            <a:avLst/>
-          </a:prstGeom>
-          <a:noFill/>
-        </p:spPr>
-        <p:txBody>
-          <a:bodyPr wrap="square" rtlCol="0">
-            <a:spAutoFit/>
-          </a:bodyPr>
-          <a:lstStyle/>
-          <a:p>
-            <a:r>
-              <a:rPr lang="en-US" u="sng" dirty="0"/>
-              <a:t>result</a:t>
-            </a:r>
-            <a:r>
-              <a:rPr lang="en-US" dirty="0"/>
-              <a:t> will be?</a:t>
-            </a:r>
-          </a:p>
-        </p:txBody>
-      </p:sp>
-      <p:sp>
-        <p:nvSpPr>
-          <p:cNvPr id="4" name="TextBox 3">
-            <a:extLst>
-              <a:ext uri="{FF2B5EF4-FFF2-40B4-BE49-F238E27FC236}">
-                <a16:creationId xmlns:a16="http://schemas.microsoft.com/office/drawing/2014/main" id="{D825AC10-AAD5-FF12-8354-7683F93E751F}"/>
-              </a:ext>
-            </a:extLst>
-          </p:cNvPr>
-          <p:cNvSpPr txBox="1"/>
-          <p:nvPr/>
-        </p:nvSpPr>
-        <p:spPr>
-          <a:xfrm>
-            <a:off x="8516303" y="4026267"/>
-            <a:ext cx="1678329" cy="369332"/>
-          </a:xfrm>
-          <a:prstGeom prst="rect">
-            <a:avLst/>
-          </a:prstGeom>
-          <a:noFill/>
-        </p:spPr>
-        <p:txBody>
-          <a:bodyPr wrap="square" rtlCol="0">
-            <a:spAutoFit/>
-          </a:bodyPr>
-          <a:lstStyle/>
-          <a:p>
-            <a:r>
-              <a:rPr lang="en-US" u="sng" dirty="0"/>
-              <a:t>result</a:t>
-            </a:r>
-            <a:r>
-              <a:rPr lang="en-US" dirty="0"/>
-              <a:t> will be?</a:t>
-            </a:r>
-          </a:p>
-        </p:txBody>
-      </p:sp>
-      <p:sp>
-        <p:nvSpPr>
-          <p:cNvPr id="5" name="TextBox 4">
-            <a:extLst>
-              <a:ext uri="{FF2B5EF4-FFF2-40B4-BE49-F238E27FC236}">
-                <a16:creationId xmlns:a16="http://schemas.microsoft.com/office/drawing/2014/main" id="{9CF2448E-AE3D-A04D-DEAC-83B45BD3B61B}"/>
-              </a:ext>
-            </a:extLst>
-          </p:cNvPr>
-          <p:cNvSpPr txBox="1"/>
-          <p:nvPr/>
-        </p:nvSpPr>
-        <p:spPr>
-          <a:xfrm>
-            <a:off x="8516303" y="5694811"/>
-            <a:ext cx="1678329" cy="369332"/>
-          </a:xfrm>
-          <a:prstGeom prst="rect">
-            <a:avLst/>
-          </a:prstGeom>
-          <a:noFill/>
-        </p:spPr>
-        <p:txBody>
-          <a:bodyPr wrap="square" rtlCol="0">
-            <a:spAutoFit/>
-          </a:bodyPr>
-          <a:lstStyle/>
-          <a:p>
-            <a:r>
-              <a:rPr lang="en-US" u="sng" dirty="0"/>
-              <a:t>result</a:t>
-            </a:r>
-            <a:r>
-              <a:rPr lang="en-US" dirty="0"/>
-              <a:t> will be?</a:t>
-            </a:r>
-          </a:p>
-        </p:txBody>
-      </p:sp>
-      <p:cxnSp>
-        <p:nvCxnSpPr>
-          <p:cNvPr id="7" name="Straight Connector 6">
-            <a:extLst>
-              <a:ext uri="{FF2B5EF4-FFF2-40B4-BE49-F238E27FC236}">
-                <a16:creationId xmlns:a16="http://schemas.microsoft.com/office/drawing/2014/main" id="{E22D1A9F-C611-23B1-5A5D-BAADB25CB1D3}"/>
-              </a:ext>
-            </a:extLst>
-          </p:cNvPr>
-          <p:cNvCxnSpPr>
-            <a:cxnSpLocks/>
-            <a:endCxn id="3" idx="1"/>
-          </p:cNvCxnSpPr>
-          <p:nvPr/>
-        </p:nvCxnSpPr>
-        <p:spPr>
-          <a:xfrm flipV="1">
-            <a:off x="7798676" y="2205270"/>
-            <a:ext cx="717627" cy="413136"/>
-          </a:xfrm>
-          <a:prstGeom prst="line">
-            <a:avLst/>
-          </a:prstGeom>
-          <a:ln w="28575"/>
-        </p:spPr>
-        <p:style>
-          <a:lnRef idx="1">
-            <a:schemeClr val="accent1"/>
-          </a:lnRef>
-          <a:fillRef idx="0">
-            <a:schemeClr val="accent1"/>
-          </a:fillRef>
-          <a:effectRef idx="0">
-            <a:schemeClr val="accent1"/>
-          </a:effectRef>
-          <a:fontRef idx="minor">
-            <a:schemeClr val="tx1"/>
-          </a:fontRef>
-        </p:style>
-      </p:cxnSp>
-      <p:cxnSp>
-        <p:nvCxnSpPr>
-          <p:cNvPr id="9" name="Straight Connector 8">
-            <a:extLst>
-              <a:ext uri="{FF2B5EF4-FFF2-40B4-BE49-F238E27FC236}">
-                <a16:creationId xmlns:a16="http://schemas.microsoft.com/office/drawing/2014/main" id="{5B16FA62-F8EB-5CCE-A2D3-01E18C05AF99}"/>
-              </a:ext>
-            </a:extLst>
-          </p:cNvPr>
-          <p:cNvCxnSpPr>
-            <a:cxnSpLocks/>
-            <a:endCxn id="4" idx="1"/>
-          </p:cNvCxnSpPr>
-          <p:nvPr/>
-        </p:nvCxnSpPr>
-        <p:spPr>
-          <a:xfrm flipV="1">
-            <a:off x="7704083" y="4210933"/>
-            <a:ext cx="812220" cy="225720"/>
-          </a:xfrm>
-          <a:prstGeom prst="line">
-            <a:avLst/>
-          </a:prstGeom>
-          <a:ln w="28575"/>
-        </p:spPr>
-        <p:style>
-          <a:lnRef idx="1">
-            <a:schemeClr val="accent1"/>
-          </a:lnRef>
-          <a:fillRef idx="0">
-            <a:schemeClr val="accent1"/>
-          </a:fillRef>
-          <a:effectRef idx="0">
-            <a:schemeClr val="accent1"/>
-          </a:effectRef>
-          <a:fontRef idx="minor">
-            <a:schemeClr val="tx1"/>
-          </a:fontRef>
-        </p:style>
-      </p:cxnSp>
-      <p:cxnSp>
-        <p:nvCxnSpPr>
-          <p:cNvPr id="11" name="Straight Connector 10">
-            <a:extLst>
-              <a:ext uri="{FF2B5EF4-FFF2-40B4-BE49-F238E27FC236}">
-                <a16:creationId xmlns:a16="http://schemas.microsoft.com/office/drawing/2014/main" id="{7F891C00-CB08-EEB3-CCFC-267A418ACA19}"/>
-              </a:ext>
-            </a:extLst>
-          </p:cNvPr>
-          <p:cNvCxnSpPr>
-            <a:cxnSpLocks/>
-            <a:endCxn id="5" idx="1"/>
-          </p:cNvCxnSpPr>
-          <p:nvPr/>
-        </p:nvCxnSpPr>
-        <p:spPr>
-          <a:xfrm>
-            <a:off x="7220607" y="4930821"/>
-            <a:ext cx="1295696" cy="948656"/>
-          </a:xfrm>
-          <a:prstGeom prst="line">
-            <a:avLst/>
-          </a:prstGeom>
-          <a:ln w="28575"/>
-        </p:spPr>
-        <p:style>
-          <a:lnRef idx="1">
-            <a:schemeClr val="accent1"/>
-          </a:lnRef>
-          <a:fillRef idx="0">
-            <a:schemeClr val="accent1"/>
-          </a:fillRef>
-          <a:effectRef idx="0">
-            <a:schemeClr val="accent1"/>
-          </a:effectRef>
-          <a:fontRef idx="minor">
-            <a:schemeClr val="tx1"/>
-          </a:fontRef>
-        </p:style>
-      </p:cxnSp>
-      <p:pic>
-        <p:nvPicPr>
-          <p:cNvPr id="6" name="Picture 5">
-            <a:extLst>
-              <a:ext uri="{FF2B5EF4-FFF2-40B4-BE49-F238E27FC236}">
-                <a16:creationId xmlns:a16="http://schemas.microsoft.com/office/drawing/2014/main" id="{71F30E0D-70A8-CD17-3613-C0B996EF2838}"/>
-              </a:ext>
-            </a:extLst>
-          </p:cNvPr>
-          <p:cNvPicPr>
-            <a:picLocks noChangeAspect="1"/>
-          </p:cNvPicPr>
-          <p:nvPr/>
-        </p:nvPicPr>
-        <p:blipFill>
-          <a:blip r:embed="rId3"/>
-          <a:stretch>
-            <a:fillRect/>
-          </a:stretch>
-        </p:blipFill>
-        <p:spPr>
-          <a:xfrm>
-            <a:off x="3262535" y="2362196"/>
-            <a:ext cx="2095500" cy="355600"/>
-          </a:xfrm>
-          <a:prstGeom prst="rect">
-            <a:avLst/>
-          </a:prstGeom>
-        </p:spPr>
-      </p:pic>
     </p:spTree>
     <p:extLst>
       <p:ext uri="{BB962C8B-B14F-4D97-AF65-F5344CB8AC3E}">
-        <p14:creationId xmlns:p14="http://schemas.microsoft.com/office/powerpoint/2010/main" val="684187631"/>
+        <p14:creationId xmlns:p14="http://schemas.microsoft.com/office/powerpoint/2010/main" val="2740764514"/>
       </p:ext>
     </p:extLst>
   </p:cSld>
@@ -5064,7 +3874,7 @@
     </p:spTree>
     <p:extLst>
       <p:ext uri="{BB962C8B-B14F-4D97-AF65-F5344CB8AC3E}">
-        <p14:creationId xmlns:p14="http://schemas.microsoft.com/office/powerpoint/2010/main" val="2740764514"/>
+        <p14:creationId xmlns:p14="http://schemas.microsoft.com/office/powerpoint/2010/main" val="2290971080"/>
       </p:ext>
     </p:extLst>
   </p:cSld>
@@ -5075,36 +3885,6 @@
 </file>
 
 <file path=ppt/slides/slide13.xml><?xml version="1.0" encoding="utf-8"?>
-<p:sld xmlns:a="http://schemas.openxmlformats.org/drawingml/2006/main" xmlns:r="http://schemas.openxmlformats.org/officeDocument/2006/relationships" xmlns:p="http://schemas.openxmlformats.org/presentationml/2006/main">
-  <p:cSld>
-    <p:spTree>
-      <p:nvGrpSpPr>
-        <p:cNvPr id="1" name=""/>
-        <p:cNvGrpSpPr/>
-        <p:nvPr/>
-      </p:nvGrpSpPr>
-      <p:grpSpPr>
-        <a:xfrm>
-          <a:off x="0" y="0"/>
-          <a:ext cx="0" cy="0"/>
-          <a:chOff x="0" y="0"/>
-          <a:chExt cx="0" cy="0"/>
-        </a:xfrm>
-      </p:grpSpPr>
-    </p:spTree>
-    <p:extLst>
-      <p:ext uri="{BB962C8B-B14F-4D97-AF65-F5344CB8AC3E}">
-        <p14:creationId xmlns:p14="http://schemas.microsoft.com/office/powerpoint/2010/main" val="2290971080"/>
-      </p:ext>
-    </p:extLst>
-  </p:cSld>
-  <p:clrMapOvr>
-    <a:masterClrMapping/>
-  </p:clrMapOvr>
-</p:sld>
-</file>
-
-<file path=ppt/slides/slide14.xml><?xml version="1.0" encoding="utf-8"?>
 <p:sld xmlns:a="http://schemas.openxmlformats.org/drawingml/2006/main" xmlns:r="http://schemas.openxmlformats.org/officeDocument/2006/relationships" xmlns:p="http://schemas.openxmlformats.org/presentationml/2006/main">
   <p:cSld>
     <p:spTree>
@@ -5302,66 +4082,6 @@
 </file>
 
 <file path=ppt/slides/slide4.xml><?xml version="1.0" encoding="utf-8"?>
-<p:sld xmlns:a="http://schemas.openxmlformats.org/drawingml/2006/main" xmlns:r="http://schemas.openxmlformats.org/officeDocument/2006/relationships" xmlns:p="http://schemas.openxmlformats.org/presentationml/2006/main">
-  <p:cSld>
-    <p:spTree>
-      <p:nvGrpSpPr>
-        <p:cNvPr id="1" name=""/>
-        <p:cNvGrpSpPr/>
-        <p:nvPr/>
-      </p:nvGrpSpPr>
-      <p:grpSpPr>
-        <a:xfrm>
-          <a:off x="0" y="0"/>
-          <a:ext cx="0" cy="0"/>
-          <a:chOff x="0" y="0"/>
-          <a:chExt cx="0" cy="0"/>
-        </a:xfrm>
-      </p:grpSpPr>
-      <p:pic>
-        <p:nvPicPr>
-          <p:cNvPr id="3" name="Picture 2">
-            <a:extLst>
-              <a:ext uri="{FF2B5EF4-FFF2-40B4-BE49-F238E27FC236}">
-                <a16:creationId xmlns:a16="http://schemas.microsoft.com/office/drawing/2014/main" id="{5EFEA366-805F-1E6A-7101-3F19E44E1CA6}"/>
-              </a:ext>
-            </a:extLst>
-          </p:cNvPr>
-          <p:cNvPicPr>
-            <a:picLocks noChangeAspect="1"/>
-          </p:cNvPicPr>
-          <p:nvPr/>
-        </p:nvPicPr>
-        <p:blipFill>
-          <a:blip r:embed="rId2"/>
-          <a:stretch>
-            <a:fillRect/>
-          </a:stretch>
-        </p:blipFill>
-        <p:spPr>
-          <a:xfrm>
-            <a:off x="2209800" y="203593"/>
-            <a:ext cx="7772400" cy="6450814"/>
-          </a:xfrm>
-          <a:prstGeom prst="rect">
-            <a:avLst/>
-          </a:prstGeom>
-        </p:spPr>
-      </p:pic>
-    </p:spTree>
-    <p:extLst>
-      <p:ext uri="{BB962C8B-B14F-4D97-AF65-F5344CB8AC3E}">
-        <p14:creationId xmlns:p14="http://schemas.microsoft.com/office/powerpoint/2010/main" val="2450126606"/>
-      </p:ext>
-    </p:extLst>
-  </p:cSld>
-  <p:clrMapOvr>
-    <a:masterClrMapping/>
-  </p:clrMapOvr>
-</p:sld>
-</file>
-
-<file path=ppt/slides/slide5.xml><?xml version="1.0" encoding="utf-8"?>
 <p:sld xmlns:a="http://schemas.openxmlformats.org/drawingml/2006/main" xmlns:r="http://schemas.openxmlformats.org/officeDocument/2006/relationships" xmlns:p="http://schemas.openxmlformats.org/presentationml/2006/main">
   <p:cSld>
     <p:spTree>
@@ -5924,7 +4644,7 @@
 </p:sld>
 </file>
 
-<file path=ppt/slides/slide6.xml><?xml version="1.0" encoding="utf-8"?>
+<file path=ppt/slides/slide5.xml><?xml version="1.0" encoding="utf-8"?>
 <p:sld xmlns:a="http://schemas.openxmlformats.org/drawingml/2006/main" xmlns:r="http://schemas.openxmlformats.org/officeDocument/2006/relationships" xmlns:p="http://schemas.openxmlformats.org/presentationml/2006/main">
   <p:cSld>
     <p:spTree>
@@ -7137,7 +5857,7 @@
 </p:sld>
 </file>
 
-<file path=ppt/slides/slide7.xml><?xml version="1.0" encoding="utf-8"?>
+<file path=ppt/slides/slide6.xml><?xml version="1.0" encoding="utf-8"?>
 <p:sld xmlns:a="http://schemas.openxmlformats.org/drawingml/2006/main" xmlns:r="http://schemas.openxmlformats.org/officeDocument/2006/relationships" xmlns:p="http://schemas.openxmlformats.org/presentationml/2006/main">
   <p:cSld>
     <p:spTree>
@@ -7464,7 +6184,7 @@
 </p:sld>
 </file>
 
-<file path=ppt/slides/slide8.xml><?xml version="1.0" encoding="utf-8"?>
+<file path=ppt/slides/slide7.xml><?xml version="1.0" encoding="utf-8"?>
 <p:sld xmlns:a="http://schemas.openxmlformats.org/drawingml/2006/main" xmlns:r="http://schemas.openxmlformats.org/officeDocument/2006/relationships" xmlns:p="http://schemas.openxmlformats.org/presentationml/2006/main">
   <p:cSld>
     <p:spTree>
@@ -8683,7 +7403,7 @@
 </p:sld>
 </file>
 
-<file path=ppt/slides/slide9.xml><?xml version="1.0" encoding="utf-8"?>
+<file path=ppt/slides/slide8.xml><?xml version="1.0" encoding="utf-8"?>
 <p:sld xmlns:a="http://schemas.openxmlformats.org/drawingml/2006/main" xmlns:r="http://schemas.openxmlformats.org/officeDocument/2006/relationships" xmlns:p="http://schemas.openxmlformats.org/presentationml/2006/main">
   <p:cSld>
     <p:spTree>
@@ -9001,6 +7721,1225 @@
     <p:extLst>
       <p:ext uri="{BB962C8B-B14F-4D97-AF65-F5344CB8AC3E}">
         <p14:creationId xmlns:p14="http://schemas.microsoft.com/office/powerpoint/2010/main" val="3615157144"/>
+      </p:ext>
+    </p:extLst>
+  </p:cSld>
+  <p:clrMapOvr>
+    <a:masterClrMapping/>
+  </p:clrMapOvr>
+</p:sld>
+</file>
+
+<file path=ppt/slides/slide9.xml><?xml version="1.0" encoding="utf-8"?>
+<p:sld xmlns:a="http://schemas.openxmlformats.org/drawingml/2006/main" xmlns:r="http://schemas.openxmlformats.org/officeDocument/2006/relationships" xmlns:p="http://schemas.openxmlformats.org/presentationml/2006/main">
+  <p:cSld>
+    <p:spTree>
+      <p:nvGrpSpPr>
+        <p:cNvPr id="1" name="">
+          <a:extLst>
+            <a:ext uri="{FF2B5EF4-FFF2-40B4-BE49-F238E27FC236}">
+              <a16:creationId xmlns:a16="http://schemas.microsoft.com/office/drawing/2014/main" id="{F59F5A11-6E09-7F49-A451-07F028756835}"/>
+            </a:ext>
+          </a:extLst>
+        </p:cNvPr>
+        <p:cNvGrpSpPr/>
+        <p:nvPr/>
+      </p:nvGrpSpPr>
+      <p:grpSpPr>
+        <a:xfrm>
+          <a:off x="0" y="0"/>
+          <a:ext cx="0" cy="0"/>
+          <a:chOff x="0" y="0"/>
+          <a:chExt cx="0" cy="0"/>
+        </a:xfrm>
+      </p:grpSpPr>
+      <p:pic>
+        <p:nvPicPr>
+          <p:cNvPr id="3" name="Picture 2">
+            <a:extLst>
+              <a:ext uri="{FF2B5EF4-FFF2-40B4-BE49-F238E27FC236}">
+                <a16:creationId xmlns:a16="http://schemas.microsoft.com/office/drawing/2014/main" id="{967DEAE7-351A-F52E-F5C3-E6D2130F87F3}"/>
+              </a:ext>
+            </a:extLst>
+          </p:cNvPr>
+          <p:cNvPicPr>
+            <a:picLocks noChangeAspect="1"/>
+          </p:cNvPicPr>
+          <p:nvPr/>
+        </p:nvPicPr>
+        <p:blipFill>
+          <a:blip r:embed="rId2"/>
+          <a:stretch>
+            <a:fillRect/>
+          </a:stretch>
+        </p:blipFill>
+        <p:spPr>
+          <a:xfrm>
+            <a:off x="2293554" y="1305766"/>
+            <a:ext cx="7604891" cy="4246468"/>
+          </a:xfrm>
+          <a:prstGeom prst="rect">
+            <a:avLst/>
+          </a:prstGeom>
+        </p:spPr>
+      </p:pic>
+      <p:sp>
+        <p:nvSpPr>
+          <p:cNvPr id="2" name="TextBox 1">
+            <a:extLst>
+              <a:ext uri="{FF2B5EF4-FFF2-40B4-BE49-F238E27FC236}">
+                <a16:creationId xmlns:a16="http://schemas.microsoft.com/office/drawing/2014/main" id="{C9376985-80F8-D111-72DA-ABE901F2C50F}"/>
+              </a:ext>
+            </a:extLst>
+          </p:cNvPr>
+          <p:cNvSpPr txBox="1"/>
+          <p:nvPr/>
+        </p:nvSpPr>
+        <p:spPr>
+          <a:xfrm>
+            <a:off x="273269" y="746234"/>
+            <a:ext cx="4635062" cy="830997"/>
+          </a:xfrm>
+          <a:prstGeom prst="rect">
+            <a:avLst/>
+          </a:prstGeom>
+          <a:noFill/>
+        </p:spPr>
+        <p:txBody>
+          <a:bodyPr wrap="square" rtlCol="0">
+            <a:spAutoFit/>
+          </a:bodyPr>
+          <a:lstStyle/>
+          <a:p>
+            <a:r>
+              <a:rPr lang="en-US" sz="2400" dirty="0">
+                <a:solidFill>
+                  <a:srgbClr val="FF0000"/>
+                </a:solidFill>
+              </a:rPr>
+              <a:t>L1, L2, I4 etc. are the</a:t>
+            </a:r>
+          </a:p>
+          <a:p>
+            <a:r>
+              <a:rPr lang="en-US" sz="2400" dirty="0">
+                <a:solidFill>
+                  <a:srgbClr val="FF0000"/>
+                </a:solidFill>
+              </a:rPr>
+              <a:t>NAMES OF THE CONSTANTS</a:t>
+            </a:r>
+          </a:p>
+        </p:txBody>
+      </p:sp>
+      <p:grpSp>
+        <p:nvGrpSpPr>
+          <p:cNvPr id="6" name="Group 5">
+            <a:extLst>
+              <a:ext uri="{FF2B5EF4-FFF2-40B4-BE49-F238E27FC236}">
+                <a16:creationId xmlns:a16="http://schemas.microsoft.com/office/drawing/2014/main" id="{FE49CCC1-BE38-00B8-9976-0E4DEFF6E4B2}"/>
+              </a:ext>
+            </a:extLst>
+          </p:cNvPr>
+          <p:cNvGrpSpPr/>
+          <p:nvPr/>
+        </p:nvGrpSpPr>
+        <p:grpSpPr>
+          <a:xfrm>
+            <a:off x="2590800" y="4712262"/>
+            <a:ext cx="642280" cy="646331"/>
+            <a:chOff x="1008994" y="3272345"/>
+            <a:chExt cx="642280" cy="646331"/>
+          </a:xfrm>
+        </p:grpSpPr>
+        <p:sp>
+          <p:nvSpPr>
+            <p:cNvPr id="5" name="Rectangle 4">
+              <a:extLst>
+                <a:ext uri="{FF2B5EF4-FFF2-40B4-BE49-F238E27FC236}">
+                  <a16:creationId xmlns:a16="http://schemas.microsoft.com/office/drawing/2014/main" id="{70DE40B5-AD30-7327-31AB-5AEC12F7978A}"/>
+                </a:ext>
+              </a:extLst>
+            </p:cNvPr>
+            <p:cNvSpPr/>
+            <p:nvPr/>
+          </p:nvSpPr>
+          <p:spPr>
+            <a:xfrm>
+              <a:off x="1031164" y="3385303"/>
+              <a:ext cx="620110" cy="420413"/>
+            </a:xfrm>
+            <a:prstGeom prst="rect">
+              <a:avLst/>
+            </a:prstGeom>
+            <a:solidFill>
+              <a:schemeClr val="bg1"/>
+            </a:solidFill>
+            <a:ln>
+              <a:solidFill>
+                <a:schemeClr val="bg1"/>
+              </a:solidFill>
+            </a:ln>
+          </p:spPr>
+          <p:style>
+            <a:lnRef idx="2">
+              <a:schemeClr val="accent1">
+                <a:shade val="15000"/>
+              </a:schemeClr>
+            </a:lnRef>
+            <a:fillRef idx="1">
+              <a:schemeClr val="accent1"/>
+            </a:fillRef>
+            <a:effectRef idx="0">
+              <a:schemeClr val="accent1"/>
+            </a:effectRef>
+            <a:fontRef idx="minor">
+              <a:schemeClr val="lt1"/>
+            </a:fontRef>
+          </p:style>
+          <p:txBody>
+            <a:bodyPr rtlCol="0" anchor="ctr"/>
+            <a:lstStyle/>
+            <a:p>
+              <a:pPr algn="ctr"/>
+              <a:endParaRPr lang="en-US"/>
+            </a:p>
+          </p:txBody>
+        </p:sp>
+        <p:sp>
+          <p:nvSpPr>
+            <p:cNvPr id="4" name="TextBox 3">
+              <a:extLst>
+                <a:ext uri="{FF2B5EF4-FFF2-40B4-BE49-F238E27FC236}">
+                  <a16:creationId xmlns:a16="http://schemas.microsoft.com/office/drawing/2014/main" id="{A75A88C7-E6D7-6CB3-8AAE-54057D3903BB}"/>
+                </a:ext>
+              </a:extLst>
+            </p:cNvPr>
+            <p:cNvSpPr txBox="1"/>
+            <p:nvPr/>
+          </p:nvSpPr>
+          <p:spPr>
+            <a:xfrm>
+              <a:off x="1008994" y="3272345"/>
+              <a:ext cx="620110" cy="646331"/>
+            </a:xfrm>
+            <a:prstGeom prst="rect">
+              <a:avLst/>
+            </a:prstGeom>
+            <a:noFill/>
+          </p:spPr>
+          <p:txBody>
+            <a:bodyPr wrap="square" rtlCol="0">
+              <a:spAutoFit/>
+            </a:bodyPr>
+            <a:lstStyle/>
+            <a:p>
+              <a:r>
+                <a:rPr lang="en-US" sz="3600" dirty="0"/>
+                <a:t>L1</a:t>
+              </a:r>
+            </a:p>
+          </p:txBody>
+        </p:sp>
+      </p:grpSp>
+      <p:grpSp>
+        <p:nvGrpSpPr>
+          <p:cNvPr id="7" name="Group 6">
+            <a:extLst>
+              <a:ext uri="{FF2B5EF4-FFF2-40B4-BE49-F238E27FC236}">
+                <a16:creationId xmlns:a16="http://schemas.microsoft.com/office/drawing/2014/main" id="{7EC5A60A-BD1F-9499-BC90-4AF172FA5511}"/>
+              </a:ext>
+            </a:extLst>
+          </p:cNvPr>
+          <p:cNvGrpSpPr/>
+          <p:nvPr/>
+        </p:nvGrpSpPr>
+        <p:grpSpPr>
+          <a:xfrm>
+            <a:off x="3836275" y="4712262"/>
+            <a:ext cx="642280" cy="646331"/>
+            <a:chOff x="1008994" y="3272345"/>
+            <a:chExt cx="642280" cy="646331"/>
+          </a:xfrm>
+        </p:grpSpPr>
+        <p:sp>
+          <p:nvSpPr>
+            <p:cNvPr id="8" name="Rectangle 7">
+              <a:extLst>
+                <a:ext uri="{FF2B5EF4-FFF2-40B4-BE49-F238E27FC236}">
+                  <a16:creationId xmlns:a16="http://schemas.microsoft.com/office/drawing/2014/main" id="{24938640-4B89-1D0B-158C-B30EF32BAB73}"/>
+                </a:ext>
+              </a:extLst>
+            </p:cNvPr>
+            <p:cNvSpPr/>
+            <p:nvPr/>
+          </p:nvSpPr>
+          <p:spPr>
+            <a:xfrm>
+              <a:off x="1031164" y="3385303"/>
+              <a:ext cx="620110" cy="420413"/>
+            </a:xfrm>
+            <a:prstGeom prst="rect">
+              <a:avLst/>
+            </a:prstGeom>
+            <a:solidFill>
+              <a:schemeClr val="bg1"/>
+            </a:solidFill>
+            <a:ln>
+              <a:solidFill>
+                <a:schemeClr val="bg1"/>
+              </a:solidFill>
+            </a:ln>
+          </p:spPr>
+          <p:style>
+            <a:lnRef idx="2">
+              <a:schemeClr val="accent1">
+                <a:shade val="15000"/>
+              </a:schemeClr>
+            </a:lnRef>
+            <a:fillRef idx="1">
+              <a:schemeClr val="accent1"/>
+            </a:fillRef>
+            <a:effectRef idx="0">
+              <a:schemeClr val="accent1"/>
+            </a:effectRef>
+            <a:fontRef idx="minor">
+              <a:schemeClr val="lt1"/>
+            </a:fontRef>
+          </p:style>
+          <p:txBody>
+            <a:bodyPr rtlCol="0" anchor="ctr"/>
+            <a:lstStyle/>
+            <a:p>
+              <a:pPr algn="ctr"/>
+              <a:endParaRPr lang="en-US"/>
+            </a:p>
+          </p:txBody>
+        </p:sp>
+        <p:sp>
+          <p:nvSpPr>
+            <p:cNvPr id="9" name="TextBox 8">
+              <a:extLst>
+                <a:ext uri="{FF2B5EF4-FFF2-40B4-BE49-F238E27FC236}">
+                  <a16:creationId xmlns:a16="http://schemas.microsoft.com/office/drawing/2014/main" id="{560F9579-A921-D8F9-96E2-68CFA2748572}"/>
+                </a:ext>
+              </a:extLst>
+            </p:cNvPr>
+            <p:cNvSpPr txBox="1"/>
+            <p:nvPr/>
+          </p:nvSpPr>
+          <p:spPr>
+            <a:xfrm>
+              <a:off x="1008994" y="3272345"/>
+              <a:ext cx="620110" cy="646331"/>
+            </a:xfrm>
+            <a:prstGeom prst="rect">
+              <a:avLst/>
+            </a:prstGeom>
+            <a:noFill/>
+          </p:spPr>
+          <p:txBody>
+            <a:bodyPr wrap="square" rtlCol="0">
+              <a:spAutoFit/>
+            </a:bodyPr>
+            <a:lstStyle/>
+            <a:p>
+              <a:r>
+                <a:rPr lang="en-US" sz="3600" dirty="0"/>
+                <a:t>L2</a:t>
+              </a:r>
+            </a:p>
+          </p:txBody>
+        </p:sp>
+      </p:grpSp>
+      <p:grpSp>
+        <p:nvGrpSpPr>
+          <p:cNvPr id="10" name="Group 9">
+            <a:extLst>
+              <a:ext uri="{FF2B5EF4-FFF2-40B4-BE49-F238E27FC236}">
+                <a16:creationId xmlns:a16="http://schemas.microsoft.com/office/drawing/2014/main" id="{2468C70E-9C4E-99E7-5713-A3C8EA72B2D7}"/>
+              </a:ext>
+            </a:extLst>
+          </p:cNvPr>
+          <p:cNvGrpSpPr/>
+          <p:nvPr/>
+        </p:nvGrpSpPr>
+        <p:grpSpPr>
+          <a:xfrm>
+            <a:off x="5077644" y="4712262"/>
+            <a:ext cx="642280" cy="646331"/>
+            <a:chOff x="1008994" y="3272345"/>
+            <a:chExt cx="642280" cy="646331"/>
+          </a:xfrm>
+        </p:grpSpPr>
+        <p:sp>
+          <p:nvSpPr>
+            <p:cNvPr id="11" name="Rectangle 10">
+              <a:extLst>
+                <a:ext uri="{FF2B5EF4-FFF2-40B4-BE49-F238E27FC236}">
+                  <a16:creationId xmlns:a16="http://schemas.microsoft.com/office/drawing/2014/main" id="{039B6D1B-C961-D06B-C5AA-75B5F5BC9661}"/>
+                </a:ext>
+              </a:extLst>
+            </p:cNvPr>
+            <p:cNvSpPr/>
+            <p:nvPr/>
+          </p:nvSpPr>
+          <p:spPr>
+            <a:xfrm>
+              <a:off x="1031164" y="3385303"/>
+              <a:ext cx="620110" cy="420413"/>
+            </a:xfrm>
+            <a:prstGeom prst="rect">
+              <a:avLst/>
+            </a:prstGeom>
+            <a:solidFill>
+              <a:schemeClr val="bg1"/>
+            </a:solidFill>
+            <a:ln>
+              <a:solidFill>
+                <a:schemeClr val="bg1"/>
+              </a:solidFill>
+            </a:ln>
+          </p:spPr>
+          <p:style>
+            <a:lnRef idx="2">
+              <a:schemeClr val="accent1">
+                <a:shade val="15000"/>
+              </a:schemeClr>
+            </a:lnRef>
+            <a:fillRef idx="1">
+              <a:schemeClr val="accent1"/>
+            </a:fillRef>
+            <a:effectRef idx="0">
+              <a:schemeClr val="accent1"/>
+            </a:effectRef>
+            <a:fontRef idx="minor">
+              <a:schemeClr val="lt1"/>
+            </a:fontRef>
+          </p:style>
+          <p:txBody>
+            <a:bodyPr rtlCol="0" anchor="ctr"/>
+            <a:lstStyle/>
+            <a:p>
+              <a:pPr algn="ctr"/>
+              <a:endParaRPr lang="en-US"/>
+            </a:p>
+          </p:txBody>
+        </p:sp>
+        <p:sp>
+          <p:nvSpPr>
+            <p:cNvPr id="12" name="TextBox 11">
+              <a:extLst>
+                <a:ext uri="{FF2B5EF4-FFF2-40B4-BE49-F238E27FC236}">
+                  <a16:creationId xmlns:a16="http://schemas.microsoft.com/office/drawing/2014/main" id="{AF01F5DA-074E-0A6B-14CD-2D8A192FC3D8}"/>
+                </a:ext>
+              </a:extLst>
+            </p:cNvPr>
+            <p:cNvSpPr txBox="1"/>
+            <p:nvPr/>
+          </p:nvSpPr>
+          <p:spPr>
+            <a:xfrm>
+              <a:off x="1008994" y="3272345"/>
+              <a:ext cx="620110" cy="646331"/>
+            </a:xfrm>
+            <a:prstGeom prst="rect">
+              <a:avLst/>
+            </a:prstGeom>
+            <a:noFill/>
+          </p:spPr>
+          <p:txBody>
+            <a:bodyPr wrap="square" rtlCol="0">
+              <a:spAutoFit/>
+            </a:bodyPr>
+            <a:lstStyle/>
+            <a:p>
+              <a:r>
+                <a:rPr lang="en-US" sz="3600" dirty="0"/>
+                <a:t>L3</a:t>
+              </a:r>
+            </a:p>
+          </p:txBody>
+        </p:sp>
+      </p:grpSp>
+      <p:grpSp>
+        <p:nvGrpSpPr>
+          <p:cNvPr id="13" name="Group 12">
+            <a:extLst>
+              <a:ext uri="{FF2B5EF4-FFF2-40B4-BE49-F238E27FC236}">
+                <a16:creationId xmlns:a16="http://schemas.microsoft.com/office/drawing/2014/main" id="{BF3F4255-AC20-99EE-6C9E-C45C396F6F8A}"/>
+              </a:ext>
+            </a:extLst>
+          </p:cNvPr>
+          <p:cNvGrpSpPr/>
+          <p:nvPr/>
+        </p:nvGrpSpPr>
+        <p:grpSpPr>
+          <a:xfrm>
+            <a:off x="6421821" y="3613931"/>
+            <a:ext cx="642280" cy="646331"/>
+            <a:chOff x="1008994" y="3272345"/>
+            <a:chExt cx="642280" cy="646331"/>
+          </a:xfrm>
+        </p:grpSpPr>
+        <p:sp>
+          <p:nvSpPr>
+            <p:cNvPr id="14" name="Rectangle 13">
+              <a:extLst>
+                <a:ext uri="{FF2B5EF4-FFF2-40B4-BE49-F238E27FC236}">
+                  <a16:creationId xmlns:a16="http://schemas.microsoft.com/office/drawing/2014/main" id="{C68EE4B0-E818-039E-24C2-FAD6C311A4AB}"/>
+                </a:ext>
+              </a:extLst>
+            </p:cNvPr>
+            <p:cNvSpPr/>
+            <p:nvPr/>
+          </p:nvSpPr>
+          <p:spPr>
+            <a:xfrm>
+              <a:off x="1031164" y="3385303"/>
+              <a:ext cx="620110" cy="420413"/>
+            </a:xfrm>
+            <a:prstGeom prst="rect">
+              <a:avLst/>
+            </a:prstGeom>
+            <a:solidFill>
+              <a:schemeClr val="bg1"/>
+            </a:solidFill>
+            <a:ln>
+              <a:solidFill>
+                <a:schemeClr val="bg1"/>
+              </a:solidFill>
+            </a:ln>
+          </p:spPr>
+          <p:style>
+            <a:lnRef idx="2">
+              <a:schemeClr val="accent1">
+                <a:shade val="15000"/>
+              </a:schemeClr>
+            </a:lnRef>
+            <a:fillRef idx="1">
+              <a:schemeClr val="accent1"/>
+            </a:fillRef>
+            <a:effectRef idx="0">
+              <a:schemeClr val="accent1"/>
+            </a:effectRef>
+            <a:fontRef idx="minor">
+              <a:schemeClr val="lt1"/>
+            </a:fontRef>
+          </p:style>
+          <p:txBody>
+            <a:bodyPr rtlCol="0" anchor="ctr"/>
+            <a:lstStyle/>
+            <a:p>
+              <a:pPr algn="ctr"/>
+              <a:endParaRPr lang="en-US"/>
+            </a:p>
+          </p:txBody>
+        </p:sp>
+        <p:sp>
+          <p:nvSpPr>
+            <p:cNvPr id="15" name="TextBox 14">
+              <a:extLst>
+                <a:ext uri="{FF2B5EF4-FFF2-40B4-BE49-F238E27FC236}">
+                  <a16:creationId xmlns:a16="http://schemas.microsoft.com/office/drawing/2014/main" id="{AF9D80FE-7029-E9F8-F125-E060A7048F8C}"/>
+                </a:ext>
+              </a:extLst>
+            </p:cNvPr>
+            <p:cNvSpPr txBox="1"/>
+            <p:nvPr/>
+          </p:nvSpPr>
+          <p:spPr>
+            <a:xfrm>
+              <a:off x="1008994" y="3272345"/>
+              <a:ext cx="620110" cy="646331"/>
+            </a:xfrm>
+            <a:prstGeom prst="rect">
+              <a:avLst/>
+            </a:prstGeom>
+            <a:noFill/>
+          </p:spPr>
+          <p:txBody>
+            <a:bodyPr wrap="square" rtlCol="0">
+              <a:spAutoFit/>
+            </a:bodyPr>
+            <a:lstStyle/>
+            <a:p>
+              <a:r>
+                <a:rPr lang="en-US" sz="3600" dirty="0"/>
+                <a:t>L4</a:t>
+              </a:r>
+            </a:p>
+          </p:txBody>
+        </p:sp>
+      </p:grpSp>
+      <p:grpSp>
+        <p:nvGrpSpPr>
+          <p:cNvPr id="16" name="Group 15">
+            <a:extLst>
+              <a:ext uri="{FF2B5EF4-FFF2-40B4-BE49-F238E27FC236}">
+                <a16:creationId xmlns:a16="http://schemas.microsoft.com/office/drawing/2014/main" id="{90289D04-15EC-3D07-C744-239904BFBBDA}"/>
+              </a:ext>
+            </a:extLst>
+          </p:cNvPr>
+          <p:cNvGrpSpPr/>
+          <p:nvPr/>
+        </p:nvGrpSpPr>
+        <p:grpSpPr>
+          <a:xfrm>
+            <a:off x="7698828" y="3613931"/>
+            <a:ext cx="642280" cy="646331"/>
+            <a:chOff x="1008994" y="3272345"/>
+            <a:chExt cx="642280" cy="646331"/>
+          </a:xfrm>
+        </p:grpSpPr>
+        <p:sp>
+          <p:nvSpPr>
+            <p:cNvPr id="17" name="Rectangle 16">
+              <a:extLst>
+                <a:ext uri="{FF2B5EF4-FFF2-40B4-BE49-F238E27FC236}">
+                  <a16:creationId xmlns:a16="http://schemas.microsoft.com/office/drawing/2014/main" id="{CA6AAE31-0D2C-1E99-01D9-05BA87417D80}"/>
+                </a:ext>
+              </a:extLst>
+            </p:cNvPr>
+            <p:cNvSpPr/>
+            <p:nvPr/>
+          </p:nvSpPr>
+          <p:spPr>
+            <a:xfrm>
+              <a:off x="1031164" y="3385303"/>
+              <a:ext cx="620110" cy="420413"/>
+            </a:xfrm>
+            <a:prstGeom prst="rect">
+              <a:avLst/>
+            </a:prstGeom>
+            <a:solidFill>
+              <a:schemeClr val="bg1"/>
+            </a:solidFill>
+            <a:ln>
+              <a:solidFill>
+                <a:schemeClr val="bg1"/>
+              </a:solidFill>
+            </a:ln>
+          </p:spPr>
+          <p:style>
+            <a:lnRef idx="2">
+              <a:schemeClr val="accent1">
+                <a:shade val="15000"/>
+              </a:schemeClr>
+            </a:lnRef>
+            <a:fillRef idx="1">
+              <a:schemeClr val="accent1"/>
+            </a:fillRef>
+            <a:effectRef idx="0">
+              <a:schemeClr val="accent1"/>
+            </a:effectRef>
+            <a:fontRef idx="minor">
+              <a:schemeClr val="lt1"/>
+            </a:fontRef>
+          </p:style>
+          <p:txBody>
+            <a:bodyPr rtlCol="0" anchor="ctr"/>
+            <a:lstStyle/>
+            <a:p>
+              <a:pPr algn="ctr"/>
+              <a:endParaRPr lang="en-US"/>
+            </a:p>
+          </p:txBody>
+        </p:sp>
+        <p:sp>
+          <p:nvSpPr>
+            <p:cNvPr id="18" name="TextBox 17">
+              <a:extLst>
+                <a:ext uri="{FF2B5EF4-FFF2-40B4-BE49-F238E27FC236}">
+                  <a16:creationId xmlns:a16="http://schemas.microsoft.com/office/drawing/2014/main" id="{8D184F32-F129-3D35-539F-5A07C60B6B6E}"/>
+                </a:ext>
+              </a:extLst>
+            </p:cNvPr>
+            <p:cNvSpPr txBox="1"/>
+            <p:nvPr/>
+          </p:nvSpPr>
+          <p:spPr>
+            <a:xfrm>
+              <a:off x="1008994" y="3272345"/>
+              <a:ext cx="620110" cy="646331"/>
+            </a:xfrm>
+            <a:prstGeom prst="rect">
+              <a:avLst/>
+            </a:prstGeom>
+            <a:noFill/>
+          </p:spPr>
+          <p:txBody>
+            <a:bodyPr wrap="square" rtlCol="0">
+              <a:spAutoFit/>
+            </a:bodyPr>
+            <a:lstStyle/>
+            <a:p>
+              <a:r>
+                <a:rPr lang="en-US" sz="3600" dirty="0"/>
+                <a:t>L5</a:t>
+              </a:r>
+            </a:p>
+          </p:txBody>
+        </p:sp>
+      </p:grpSp>
+      <p:grpSp>
+        <p:nvGrpSpPr>
+          <p:cNvPr id="19" name="Group 18">
+            <a:extLst>
+              <a:ext uri="{FF2B5EF4-FFF2-40B4-BE49-F238E27FC236}">
+                <a16:creationId xmlns:a16="http://schemas.microsoft.com/office/drawing/2014/main" id="{0A938B1B-DF42-7E3B-43EE-39CD80D9C5E4}"/>
+              </a:ext>
+            </a:extLst>
+          </p:cNvPr>
+          <p:cNvGrpSpPr/>
+          <p:nvPr/>
+        </p:nvGrpSpPr>
+        <p:grpSpPr>
+          <a:xfrm>
+            <a:off x="9032984" y="3613929"/>
+            <a:ext cx="642280" cy="646331"/>
+            <a:chOff x="1008994" y="3272345"/>
+            <a:chExt cx="642280" cy="646331"/>
+          </a:xfrm>
+        </p:grpSpPr>
+        <p:sp>
+          <p:nvSpPr>
+            <p:cNvPr id="20" name="Rectangle 19">
+              <a:extLst>
+                <a:ext uri="{FF2B5EF4-FFF2-40B4-BE49-F238E27FC236}">
+                  <a16:creationId xmlns:a16="http://schemas.microsoft.com/office/drawing/2014/main" id="{22F642AD-C092-722D-5B5E-625305FB5A42}"/>
+                </a:ext>
+              </a:extLst>
+            </p:cNvPr>
+            <p:cNvSpPr/>
+            <p:nvPr/>
+          </p:nvSpPr>
+          <p:spPr>
+            <a:xfrm>
+              <a:off x="1031164" y="3385303"/>
+              <a:ext cx="620110" cy="420413"/>
+            </a:xfrm>
+            <a:prstGeom prst="rect">
+              <a:avLst/>
+            </a:prstGeom>
+            <a:solidFill>
+              <a:schemeClr val="bg1"/>
+            </a:solidFill>
+            <a:ln>
+              <a:solidFill>
+                <a:schemeClr val="bg1"/>
+              </a:solidFill>
+            </a:ln>
+          </p:spPr>
+          <p:style>
+            <a:lnRef idx="2">
+              <a:schemeClr val="accent1">
+                <a:shade val="15000"/>
+              </a:schemeClr>
+            </a:lnRef>
+            <a:fillRef idx="1">
+              <a:schemeClr val="accent1"/>
+            </a:fillRef>
+            <a:effectRef idx="0">
+              <a:schemeClr val="accent1"/>
+            </a:effectRef>
+            <a:fontRef idx="minor">
+              <a:schemeClr val="lt1"/>
+            </a:fontRef>
+          </p:style>
+          <p:txBody>
+            <a:bodyPr rtlCol="0" anchor="ctr"/>
+            <a:lstStyle/>
+            <a:p>
+              <a:pPr algn="ctr"/>
+              <a:endParaRPr lang="en-US"/>
+            </a:p>
+          </p:txBody>
+        </p:sp>
+        <p:sp>
+          <p:nvSpPr>
+            <p:cNvPr id="21" name="TextBox 20">
+              <a:extLst>
+                <a:ext uri="{FF2B5EF4-FFF2-40B4-BE49-F238E27FC236}">
+                  <a16:creationId xmlns:a16="http://schemas.microsoft.com/office/drawing/2014/main" id="{188C435D-9083-E476-67B5-5CFD82943D5F}"/>
+                </a:ext>
+              </a:extLst>
+            </p:cNvPr>
+            <p:cNvSpPr txBox="1"/>
+            <p:nvPr/>
+          </p:nvSpPr>
+          <p:spPr>
+            <a:xfrm>
+              <a:off x="1008994" y="3272345"/>
+              <a:ext cx="620110" cy="646331"/>
+            </a:xfrm>
+            <a:prstGeom prst="rect">
+              <a:avLst/>
+            </a:prstGeom>
+            <a:noFill/>
+          </p:spPr>
+          <p:txBody>
+            <a:bodyPr wrap="square" rtlCol="0">
+              <a:spAutoFit/>
+            </a:bodyPr>
+            <a:lstStyle/>
+            <a:p>
+              <a:r>
+                <a:rPr lang="en-US" sz="3600" dirty="0"/>
+                <a:t>L6</a:t>
+              </a:r>
+            </a:p>
+          </p:txBody>
+        </p:sp>
+      </p:grpSp>
+      <p:grpSp>
+        <p:nvGrpSpPr>
+          <p:cNvPr id="22" name="Group 21">
+            <a:extLst>
+              <a:ext uri="{FF2B5EF4-FFF2-40B4-BE49-F238E27FC236}">
+                <a16:creationId xmlns:a16="http://schemas.microsoft.com/office/drawing/2014/main" id="{45F50AFC-2FFB-D8C8-DB84-0AAE3DCF9B48}"/>
+              </a:ext>
+            </a:extLst>
+          </p:cNvPr>
+          <p:cNvGrpSpPr/>
+          <p:nvPr/>
+        </p:nvGrpSpPr>
+        <p:grpSpPr>
+          <a:xfrm>
+            <a:off x="3778467" y="3639448"/>
+            <a:ext cx="735725" cy="646331"/>
+            <a:chOff x="951186" y="3272343"/>
+            <a:chExt cx="735725" cy="646331"/>
+          </a:xfrm>
+        </p:grpSpPr>
+        <p:sp>
+          <p:nvSpPr>
+            <p:cNvPr id="23" name="Rectangle 22">
+              <a:extLst>
+                <a:ext uri="{FF2B5EF4-FFF2-40B4-BE49-F238E27FC236}">
+                  <a16:creationId xmlns:a16="http://schemas.microsoft.com/office/drawing/2014/main" id="{63051964-F230-3C36-E08B-9AEAFCFC5E94}"/>
+                </a:ext>
+              </a:extLst>
+            </p:cNvPr>
+            <p:cNvSpPr/>
+            <p:nvPr/>
+          </p:nvSpPr>
+          <p:spPr>
+            <a:xfrm>
+              <a:off x="1031164" y="3385303"/>
+              <a:ext cx="620110" cy="420413"/>
+            </a:xfrm>
+            <a:prstGeom prst="rect">
+              <a:avLst/>
+            </a:prstGeom>
+            <a:solidFill>
+              <a:schemeClr val="bg1"/>
+            </a:solidFill>
+            <a:ln>
+              <a:solidFill>
+                <a:schemeClr val="bg1"/>
+              </a:solidFill>
+            </a:ln>
+          </p:spPr>
+          <p:style>
+            <a:lnRef idx="2">
+              <a:schemeClr val="accent1">
+                <a:shade val="15000"/>
+              </a:schemeClr>
+            </a:lnRef>
+            <a:fillRef idx="1">
+              <a:schemeClr val="accent1"/>
+            </a:fillRef>
+            <a:effectRef idx="0">
+              <a:schemeClr val="accent1"/>
+            </a:effectRef>
+            <a:fontRef idx="minor">
+              <a:schemeClr val="lt1"/>
+            </a:fontRef>
+          </p:style>
+          <p:txBody>
+            <a:bodyPr rtlCol="0" anchor="ctr"/>
+            <a:lstStyle/>
+            <a:p>
+              <a:pPr algn="ctr"/>
+              <a:endParaRPr lang="en-US"/>
+            </a:p>
+          </p:txBody>
+        </p:sp>
+        <p:sp>
+          <p:nvSpPr>
+            <p:cNvPr id="24" name="TextBox 23">
+              <a:extLst>
+                <a:ext uri="{FF2B5EF4-FFF2-40B4-BE49-F238E27FC236}">
+                  <a16:creationId xmlns:a16="http://schemas.microsoft.com/office/drawing/2014/main" id="{487E55E0-7433-C476-379A-1D28B671EAD0}"/>
+                </a:ext>
+              </a:extLst>
+            </p:cNvPr>
+            <p:cNvSpPr txBox="1"/>
+            <p:nvPr/>
+          </p:nvSpPr>
+          <p:spPr>
+            <a:xfrm>
+              <a:off x="951186" y="3272343"/>
+              <a:ext cx="735725" cy="646331"/>
+            </a:xfrm>
+            <a:prstGeom prst="rect">
+              <a:avLst/>
+            </a:prstGeom>
+            <a:noFill/>
+          </p:spPr>
+          <p:txBody>
+            <a:bodyPr wrap="square" rtlCol="0">
+              <a:spAutoFit/>
+            </a:bodyPr>
+            <a:lstStyle/>
+            <a:p>
+              <a:pPr algn="ctr"/>
+              <a:r>
+                <a:rPr lang="en-US" sz="3600" dirty="0"/>
+                <a:t>I1</a:t>
+              </a:r>
+            </a:p>
+          </p:txBody>
+        </p:sp>
+      </p:grpSp>
+      <p:grpSp>
+        <p:nvGrpSpPr>
+          <p:cNvPr id="26" name="Group 25">
+            <a:extLst>
+              <a:ext uri="{FF2B5EF4-FFF2-40B4-BE49-F238E27FC236}">
+                <a16:creationId xmlns:a16="http://schemas.microsoft.com/office/drawing/2014/main" id="{532C7A2A-D723-6AD8-3290-2076D88B5DDE}"/>
+              </a:ext>
+            </a:extLst>
+          </p:cNvPr>
+          <p:cNvGrpSpPr/>
+          <p:nvPr/>
+        </p:nvGrpSpPr>
+        <p:grpSpPr>
+          <a:xfrm>
+            <a:off x="4442918" y="2595236"/>
+            <a:ext cx="735725" cy="646331"/>
+            <a:chOff x="951186" y="3272343"/>
+            <a:chExt cx="735725" cy="646331"/>
+          </a:xfrm>
+        </p:grpSpPr>
+        <p:sp>
+          <p:nvSpPr>
+            <p:cNvPr id="27" name="Rectangle 26">
+              <a:extLst>
+                <a:ext uri="{FF2B5EF4-FFF2-40B4-BE49-F238E27FC236}">
+                  <a16:creationId xmlns:a16="http://schemas.microsoft.com/office/drawing/2014/main" id="{BB831551-70EA-07B7-BAC9-F60AD098BF7B}"/>
+                </a:ext>
+              </a:extLst>
+            </p:cNvPr>
+            <p:cNvSpPr/>
+            <p:nvPr/>
+          </p:nvSpPr>
+          <p:spPr>
+            <a:xfrm>
+              <a:off x="1031164" y="3385303"/>
+              <a:ext cx="620110" cy="420413"/>
+            </a:xfrm>
+            <a:prstGeom prst="rect">
+              <a:avLst/>
+            </a:prstGeom>
+            <a:solidFill>
+              <a:schemeClr val="bg1"/>
+            </a:solidFill>
+            <a:ln>
+              <a:solidFill>
+                <a:schemeClr val="bg1"/>
+              </a:solidFill>
+            </a:ln>
+          </p:spPr>
+          <p:style>
+            <a:lnRef idx="2">
+              <a:schemeClr val="accent1">
+                <a:shade val="15000"/>
+              </a:schemeClr>
+            </a:lnRef>
+            <a:fillRef idx="1">
+              <a:schemeClr val="accent1"/>
+            </a:fillRef>
+            <a:effectRef idx="0">
+              <a:schemeClr val="accent1"/>
+            </a:effectRef>
+            <a:fontRef idx="minor">
+              <a:schemeClr val="lt1"/>
+            </a:fontRef>
+          </p:style>
+          <p:txBody>
+            <a:bodyPr rtlCol="0" anchor="ctr"/>
+            <a:lstStyle/>
+            <a:p>
+              <a:pPr algn="ctr"/>
+              <a:endParaRPr lang="en-US"/>
+            </a:p>
+          </p:txBody>
+        </p:sp>
+        <p:sp>
+          <p:nvSpPr>
+            <p:cNvPr id="28" name="TextBox 27">
+              <a:extLst>
+                <a:ext uri="{FF2B5EF4-FFF2-40B4-BE49-F238E27FC236}">
+                  <a16:creationId xmlns:a16="http://schemas.microsoft.com/office/drawing/2014/main" id="{09FBBB9F-776C-F22C-0141-E38D280B3740}"/>
+                </a:ext>
+              </a:extLst>
+            </p:cNvPr>
+            <p:cNvSpPr txBox="1"/>
+            <p:nvPr/>
+          </p:nvSpPr>
+          <p:spPr>
+            <a:xfrm>
+              <a:off x="951186" y="3272343"/>
+              <a:ext cx="735725" cy="646331"/>
+            </a:xfrm>
+            <a:prstGeom prst="rect">
+              <a:avLst/>
+            </a:prstGeom>
+            <a:noFill/>
+          </p:spPr>
+          <p:txBody>
+            <a:bodyPr wrap="square" rtlCol="0">
+              <a:spAutoFit/>
+            </a:bodyPr>
+            <a:lstStyle/>
+            <a:p>
+              <a:pPr algn="ctr"/>
+              <a:r>
+                <a:rPr lang="en-US" sz="3600" dirty="0"/>
+                <a:t>I2</a:t>
+              </a:r>
+            </a:p>
+          </p:txBody>
+        </p:sp>
+      </p:grpSp>
+      <p:grpSp>
+        <p:nvGrpSpPr>
+          <p:cNvPr id="29" name="Group 28">
+            <a:extLst>
+              <a:ext uri="{FF2B5EF4-FFF2-40B4-BE49-F238E27FC236}">
+                <a16:creationId xmlns:a16="http://schemas.microsoft.com/office/drawing/2014/main" id="{3B1D6B3E-0286-E41A-5F3A-91A13F7F3355}"/>
+              </a:ext>
+            </a:extLst>
+          </p:cNvPr>
+          <p:cNvGrpSpPr/>
+          <p:nvPr/>
+        </p:nvGrpSpPr>
+        <p:grpSpPr>
+          <a:xfrm>
+            <a:off x="8311875" y="2587954"/>
+            <a:ext cx="735725" cy="646331"/>
+            <a:chOff x="951186" y="3272343"/>
+            <a:chExt cx="735725" cy="646331"/>
+          </a:xfrm>
+        </p:grpSpPr>
+        <p:sp>
+          <p:nvSpPr>
+            <p:cNvPr id="30" name="Rectangle 29">
+              <a:extLst>
+                <a:ext uri="{FF2B5EF4-FFF2-40B4-BE49-F238E27FC236}">
+                  <a16:creationId xmlns:a16="http://schemas.microsoft.com/office/drawing/2014/main" id="{C98493CB-022D-F1A6-4D4F-DF5BBED5AE80}"/>
+                </a:ext>
+              </a:extLst>
+            </p:cNvPr>
+            <p:cNvSpPr/>
+            <p:nvPr/>
+          </p:nvSpPr>
+          <p:spPr>
+            <a:xfrm>
+              <a:off x="1031164" y="3385303"/>
+              <a:ext cx="620110" cy="420413"/>
+            </a:xfrm>
+            <a:prstGeom prst="rect">
+              <a:avLst/>
+            </a:prstGeom>
+            <a:solidFill>
+              <a:schemeClr val="bg1"/>
+            </a:solidFill>
+            <a:ln>
+              <a:solidFill>
+                <a:schemeClr val="bg1"/>
+              </a:solidFill>
+            </a:ln>
+          </p:spPr>
+          <p:style>
+            <a:lnRef idx="2">
+              <a:schemeClr val="accent1">
+                <a:shade val="15000"/>
+              </a:schemeClr>
+            </a:lnRef>
+            <a:fillRef idx="1">
+              <a:schemeClr val="accent1"/>
+            </a:fillRef>
+            <a:effectRef idx="0">
+              <a:schemeClr val="accent1"/>
+            </a:effectRef>
+            <a:fontRef idx="minor">
+              <a:schemeClr val="lt1"/>
+            </a:fontRef>
+          </p:style>
+          <p:txBody>
+            <a:bodyPr rtlCol="0" anchor="ctr"/>
+            <a:lstStyle/>
+            <a:p>
+              <a:pPr algn="ctr"/>
+              <a:endParaRPr lang="en-US"/>
+            </a:p>
+          </p:txBody>
+        </p:sp>
+        <p:sp>
+          <p:nvSpPr>
+            <p:cNvPr id="31" name="TextBox 30">
+              <a:extLst>
+                <a:ext uri="{FF2B5EF4-FFF2-40B4-BE49-F238E27FC236}">
+                  <a16:creationId xmlns:a16="http://schemas.microsoft.com/office/drawing/2014/main" id="{B425002F-873B-FABB-E7F3-46FF8896B5B5}"/>
+                </a:ext>
+              </a:extLst>
+            </p:cNvPr>
+            <p:cNvSpPr txBox="1"/>
+            <p:nvPr/>
+          </p:nvSpPr>
+          <p:spPr>
+            <a:xfrm>
+              <a:off x="951186" y="3272343"/>
+              <a:ext cx="735725" cy="646331"/>
+            </a:xfrm>
+            <a:prstGeom prst="rect">
+              <a:avLst/>
+            </a:prstGeom>
+            <a:noFill/>
+          </p:spPr>
+          <p:txBody>
+            <a:bodyPr wrap="square" rtlCol="0">
+              <a:spAutoFit/>
+            </a:bodyPr>
+            <a:lstStyle/>
+            <a:p>
+              <a:pPr algn="ctr"/>
+              <a:r>
+                <a:rPr lang="en-US" sz="3600" dirty="0"/>
+                <a:t>I3</a:t>
+              </a:r>
+            </a:p>
+          </p:txBody>
+        </p:sp>
+      </p:grpSp>
+      <p:grpSp>
+        <p:nvGrpSpPr>
+          <p:cNvPr id="32" name="Group 31">
+            <a:extLst>
+              <a:ext uri="{FF2B5EF4-FFF2-40B4-BE49-F238E27FC236}">
+                <a16:creationId xmlns:a16="http://schemas.microsoft.com/office/drawing/2014/main" id="{78954D76-5241-9A96-55E3-7D58A512CCD6}"/>
+              </a:ext>
+            </a:extLst>
+          </p:cNvPr>
+          <p:cNvGrpSpPr/>
+          <p:nvPr/>
+        </p:nvGrpSpPr>
+        <p:grpSpPr>
+          <a:xfrm>
+            <a:off x="5728136" y="1490352"/>
+            <a:ext cx="735725" cy="646331"/>
+            <a:chOff x="951186" y="3272343"/>
+            <a:chExt cx="735725" cy="646331"/>
+          </a:xfrm>
+        </p:grpSpPr>
+        <p:sp>
+          <p:nvSpPr>
+            <p:cNvPr id="33" name="Rectangle 32">
+              <a:extLst>
+                <a:ext uri="{FF2B5EF4-FFF2-40B4-BE49-F238E27FC236}">
+                  <a16:creationId xmlns:a16="http://schemas.microsoft.com/office/drawing/2014/main" id="{86630802-3332-3A7A-F184-EB08C9F77B14}"/>
+                </a:ext>
+              </a:extLst>
+            </p:cNvPr>
+            <p:cNvSpPr/>
+            <p:nvPr/>
+          </p:nvSpPr>
+          <p:spPr>
+            <a:xfrm>
+              <a:off x="1031164" y="3385303"/>
+              <a:ext cx="620110" cy="420413"/>
+            </a:xfrm>
+            <a:prstGeom prst="rect">
+              <a:avLst/>
+            </a:prstGeom>
+            <a:solidFill>
+              <a:schemeClr val="bg1"/>
+            </a:solidFill>
+            <a:ln>
+              <a:solidFill>
+                <a:schemeClr val="bg1"/>
+              </a:solidFill>
+            </a:ln>
+          </p:spPr>
+          <p:style>
+            <a:lnRef idx="2">
+              <a:schemeClr val="accent1">
+                <a:shade val="15000"/>
+              </a:schemeClr>
+            </a:lnRef>
+            <a:fillRef idx="1">
+              <a:schemeClr val="accent1"/>
+            </a:fillRef>
+            <a:effectRef idx="0">
+              <a:schemeClr val="accent1"/>
+            </a:effectRef>
+            <a:fontRef idx="minor">
+              <a:schemeClr val="lt1"/>
+            </a:fontRef>
+          </p:style>
+          <p:txBody>
+            <a:bodyPr rtlCol="0" anchor="ctr"/>
+            <a:lstStyle/>
+            <a:p>
+              <a:pPr algn="ctr"/>
+              <a:endParaRPr lang="en-US"/>
+            </a:p>
+          </p:txBody>
+        </p:sp>
+        <p:sp>
+          <p:nvSpPr>
+            <p:cNvPr id="34" name="TextBox 33">
+              <a:extLst>
+                <a:ext uri="{FF2B5EF4-FFF2-40B4-BE49-F238E27FC236}">
+                  <a16:creationId xmlns:a16="http://schemas.microsoft.com/office/drawing/2014/main" id="{C90217AD-1D61-03AC-8A1B-5C12329C7DD7}"/>
+                </a:ext>
+              </a:extLst>
+            </p:cNvPr>
+            <p:cNvSpPr txBox="1"/>
+            <p:nvPr/>
+          </p:nvSpPr>
+          <p:spPr>
+            <a:xfrm>
+              <a:off x="951186" y="3272343"/>
+              <a:ext cx="735725" cy="646331"/>
+            </a:xfrm>
+            <a:prstGeom prst="rect">
+              <a:avLst/>
+            </a:prstGeom>
+            <a:noFill/>
+          </p:spPr>
+          <p:txBody>
+            <a:bodyPr wrap="square" rtlCol="0">
+              <a:spAutoFit/>
+            </a:bodyPr>
+            <a:lstStyle/>
+            <a:p>
+              <a:pPr algn="ctr"/>
+              <a:r>
+                <a:rPr lang="en-US" sz="3600" dirty="0"/>
+                <a:t>I4</a:t>
+              </a:r>
+            </a:p>
+          </p:txBody>
+        </p:sp>
+      </p:grpSp>
+    </p:spTree>
+    <p:extLst>
+      <p:ext uri="{BB962C8B-B14F-4D97-AF65-F5344CB8AC3E}">
+        <p14:creationId xmlns:p14="http://schemas.microsoft.com/office/powerpoint/2010/main" val="3094537157"/>
       </p:ext>
     </p:extLst>
   </p:cSld>
